--- a/Submission/EduTrack_Presentation_Fixed.pptx
+++ b/Submission/EduTrack_Presentation_Fixed.pptx
@@ -13,9 +13,10 @@
     <p:sldId id="261" r:id="rId7"/>
     <p:sldId id="262" r:id="rId8"/>
     <p:sldId id="263" r:id="rId9"/>
+    <p:sldId id="264" r:id="rId10"/>
   </p:sldIdLst>
   <p:notesMasterIdLst>
-    <p:notesMasterId r:id="rId10"/>
+    <p:notesMasterId r:id="rId11"/>
   </p:notesMasterIdLst>
   <p:sldSz cx="12192000" cy="6858000"/>
   <p:notesSz cx="6858000" cy="12192000"/>
@@ -1149,6 +1150,94 @@
             <a:fld id="{F7021451-1387-4CA6-816F-3879F97B5CBC}" type="slidenum">
               <a:rPr lang="en-US"/>
               <a:t>8</a:t>
+            </a:fld>
+            <a:endParaRPr lang="en-US"/>
+          </a:p>
+        </p:txBody>
+      </p:sp>
+    </p:spTree>
+    <p:extLst>
+      <p:ext uri="{BB962C8B-B14F-4D97-AF65-F5344CB8AC3E}">
+        <p14:creationId xmlns:p14="http://schemas.microsoft.com/office/powerpoint/2010/main" val="1024086991"/>
+      </p:ext>
+    </p:extLst>
+  </p:cSld>
+  <p:clrMapOvr>
+    <a:masterClrMapping/>
+  </p:clrMapOvr>
+</p:notes>
+</file>
+
+<file path=ppt/notesSlides/notesSlide9.xml><?xml version="1.0" encoding="utf-8"?>
+<p:notes xmlns:a="http://schemas.openxmlformats.org/drawingml/2006/main" xmlns:r="http://schemas.openxmlformats.org/officeDocument/2006/relationships" xmlns:p="http://schemas.openxmlformats.org/presentationml/2006/main">
+  <p:cSld>
+    <p:spTree>
+      <p:nvGrpSpPr>
+        <p:cNvPr id="1" name=""/>
+        <p:cNvGrpSpPr/>
+        <p:nvPr/>
+      </p:nvGrpSpPr>
+      <p:grpSpPr>
+        <a:xfrm>
+          <a:off x="0" y="0"/>
+          <a:ext cx="0" cy="0"/>
+          <a:chOff x="0" y="0"/>
+          <a:chExt cx="0" cy="0"/>
+        </a:xfrm>
+      </p:grpSpPr>
+      <p:sp>
+        <p:nvSpPr>
+          <p:cNvPr id="2" name="Slide Image Placeholder 1"/>
+          <p:cNvSpPr>
+            <a:spLocks noGrp="1" noRot="1" noChangeAspect="1"/>
+          </p:cNvSpPr>
+          <p:nvPr>
+            <p:ph type="sldImg"/>
+          </p:nvPr>
+        </p:nvSpPr>
+        <p:spPr/>
+      </p:sp>
+      <p:sp>
+        <p:nvSpPr>
+          <p:cNvPr id="3" name="Notes Placeholder 2"/>
+          <p:cNvSpPr>
+            <a:spLocks noGrp="1"/>
+          </p:cNvSpPr>
+          <p:nvPr>
+            <p:ph type="body" idx="1"/>
+          </p:nvPr>
+        </p:nvSpPr>
+        <p:spPr/>
+        <p:txBody>
+          <a:bodyPr/>
+          <a:lstStyle/>
+          <a:p>
+            <a:r>
+              <a:rPr lang="en-US" dirty="0"/>
+              <a:t/>
+            </a:r>
+            <a:endParaRPr lang="en-US" dirty="0"/>
+          </a:p>
+        </p:txBody>
+      </p:sp>
+      <p:sp>
+        <p:nvSpPr>
+          <p:cNvPr id="4" name="Slide Number Placeholder 3"/>
+          <p:cNvSpPr>
+            <a:spLocks noGrp="1"/>
+          </p:cNvSpPr>
+          <p:nvPr>
+            <p:ph type="sldNum" sz="quarter" idx="10"/>
+          </p:nvPr>
+        </p:nvSpPr>
+        <p:spPr/>
+        <p:txBody>
+          <a:bodyPr/>
+          <a:lstStyle/>
+          <a:p>
+            <a:fld id="{F7021451-1387-4CA6-816F-3879F97B5CBC}" type="slidenum">
+              <a:rPr lang="en-US"/>
+              <a:t>9</a:t>
             </a:fld>
             <a:endParaRPr lang="en-US"/>
           </a:p>
@@ -1622,7 +1711,7 @@
         </p:nvSpPr>
         <p:spPr>
           <a:xfrm>
-            <a:off x="731520" y="3474720"/>
+            <a:off x="731520" y="3383280"/>
             <a:ext cx="2926080" cy="365760"/>
           </a:xfrm>
           <a:prstGeom prst="rect">
@@ -1661,7 +1750,7 @@
         </p:nvSpPr>
         <p:spPr>
           <a:xfrm>
-            <a:off x="3657600" y="3474720"/>
+            <a:off x="3657600" y="3383280"/>
             <a:ext cx="7315200" cy="365760"/>
           </a:xfrm>
           <a:prstGeom prst="rect">
@@ -1700,7 +1789,7 @@
         </p:nvSpPr>
         <p:spPr>
           <a:xfrm>
-            <a:off x="731520" y="3886200"/>
+            <a:off x="731520" y="3794760"/>
             <a:ext cx="2926080" cy="365760"/>
           </a:xfrm>
           <a:prstGeom prst="rect">
@@ -1739,7 +1828,7 @@
         </p:nvSpPr>
         <p:spPr>
           <a:xfrm>
-            <a:off x="3657600" y="3886200"/>
+            <a:off x="3657600" y="3794760"/>
             <a:ext cx="7315200" cy="365760"/>
           </a:xfrm>
           <a:prstGeom prst="rect">
@@ -1778,7 +1867,7 @@
         </p:nvSpPr>
         <p:spPr>
           <a:xfrm>
-            <a:off x="731520" y="4297680"/>
+            <a:off x="731520" y="4206240"/>
             <a:ext cx="2926080" cy="365760"/>
           </a:xfrm>
           <a:prstGeom prst="rect">
@@ -1817,7 +1906,7 @@
         </p:nvSpPr>
         <p:spPr>
           <a:xfrm>
-            <a:off x="3657600" y="4297680"/>
+            <a:off x="3657600" y="4206240"/>
             <a:ext cx="7315200" cy="365760"/>
           </a:xfrm>
           <a:prstGeom prst="rect">
@@ -1856,7 +1945,7 @@
         </p:nvSpPr>
         <p:spPr>
           <a:xfrm>
-            <a:off x="731520" y="4709160"/>
+            <a:off x="731520" y="4617720"/>
             <a:ext cx="2926080" cy="365760"/>
           </a:xfrm>
           <a:prstGeom prst="rect">
@@ -1895,7 +1984,7 @@
         </p:nvSpPr>
         <p:spPr>
           <a:xfrm>
-            <a:off x="3657600" y="4709160"/>
+            <a:off x="3657600" y="4617720"/>
             <a:ext cx="7315200" cy="365760"/>
           </a:xfrm>
           <a:prstGeom prst="rect">
@@ -1934,7 +2023,7 @@
         </p:nvSpPr>
         <p:spPr>
           <a:xfrm>
-            <a:off x="731520" y="5120640"/>
+            <a:off x="731520" y="5029200"/>
             <a:ext cx="2926080" cy="365760"/>
           </a:xfrm>
           <a:prstGeom prst="rect">
@@ -1973,7 +2062,7 @@
         </p:nvSpPr>
         <p:spPr>
           <a:xfrm>
-            <a:off x="3657600" y="5120640"/>
+            <a:off x="3657600" y="5029200"/>
             <a:ext cx="7315200" cy="365760"/>
           </a:xfrm>
           <a:prstGeom prst="rect">
@@ -1999,6 +2088,93 @@
                 <a:cs typeface="Arial" pitchFamily="34" charset="-120"/>
               </a:rPr>
               <a:t>Bal Bharati Public School, Navi Mumbai</a:t>
+            </a:r>
+            <a:endParaRPr lang="en-US" sz="1600" dirty="0"/>
+          </a:p>
+        </p:txBody>
+      </p:sp>
+      <p:sp>
+        <p:nvSpPr>
+          <p:cNvPr id="16" name="Text 14"/>
+          <p:cNvSpPr/>
+          <p:nvPr/>
+        </p:nvSpPr>
+        <p:spPr>
+          <a:xfrm>
+            <a:off x="731520" y="5440680"/>
+            <a:ext cx="2926080" cy="365760"/>
+          </a:xfrm>
+          <a:prstGeom prst="rect">
+            <a:avLst/>
+          </a:prstGeom>
+          <a:noFill/>
+          <a:ln/>
+        </p:spPr>
+        <p:txBody>
+          <a:bodyPr wrap="square" rtlCol="0" anchor="ctr"/>
+          <a:lstStyle/>
+          <a:p>
+            <a:pPr indent="0" marL="0">
+              <a:buNone/>
+            </a:pPr>
+            <a:r>
+              <a:rPr lang="en-US" sz="1600" b="1" dirty="0">
+                <a:solidFill>
+                  <a:srgbClr val="6366F1"/>
+                </a:solidFill>
+                <a:latin typeface="Arial" pitchFamily="34" charset="0"/>
+                <a:ea typeface="Arial" pitchFamily="34" charset="-122"/>
+                <a:cs typeface="Arial" pitchFamily="34" charset="-120"/>
+              </a:rPr>
+              <a:t>Application Link : </a:t>
+            </a:r>
+            <a:endParaRPr lang="en-US" sz="1600" dirty="0"/>
+          </a:p>
+        </p:txBody>
+      </p:sp>
+      <p:sp>
+        <p:nvSpPr>
+          <p:cNvPr id="17" name="Text 15">
+            <a:hlinkClick r:id="rId1" tooltip=""/>
+          </p:cNvPr>
+          <p:cNvSpPr/>
+          <p:nvPr/>
+        </p:nvSpPr>
+        <p:spPr>
+          <a:xfrm>
+            <a:off x="3657600" y="5440680"/>
+            <a:ext cx="7315200" cy="365760"/>
+          </a:xfrm>
+          <a:prstGeom prst="rect">
+            <a:avLst/>
+          </a:prstGeom>
+          <a:noFill/>
+          <a:ln/>
+        </p:spPr>
+        <p:txBody>
+          <a:bodyPr wrap="square" rtlCol="0" anchor="ctr"/>
+          <a:lstStyle/>
+          <a:p>
+            <a:pPr indent="0" marL="0">
+              <a:buNone/>
+            </a:pPr>
+            <a:r>
+              <a:rPr lang="en-US" sz="1600" b="1" u="sng" dirty="0">
+                <a:solidFill>
+                  <a:srgbClr val="6366F1"/>
+                </a:solidFill>
+                <a:latin typeface="Arial" pitchFamily="34" charset="0"/>
+                <a:ea typeface="Arial" pitchFamily="34" charset="-122"/>
+                <a:cs typeface="Arial" pitchFamily="34" charset="-120"/>
+                <a:hlinkClick r:id="rId1" invalidUrl="" action="" tgtFrame="" tooltip="" history="1" highlightClick="0" endSnd="0">
+                  <a:extLst>
+                    <a:ext uri="{A12FA001-AC4F-418D-AE19-62706E023703}">
+                      <ahyp:hlinkClr xmlns:ahyp="http://schemas.microsoft.com/office/drawing/2018/hyperlinkcolor" val="tx"/>
+                    </a:ext>
+                  </a:extLst>
+                </a:hlinkClick>
+              </a:rPr>
+              <a:t>https://edutrack.app</a:t>
             </a:r>
             <a:endParaRPr lang="en-US" sz="1600" dirty="0"/>
           </a:p>
@@ -7412,7 +7588,7 @@
         </p:nvSpPr>
         <p:spPr>
           <a:xfrm>
-            <a:off x="2286000" y="5120640"/>
+            <a:off x="2286000" y="5029200"/>
             <a:ext cx="7616952" cy="457200"/>
           </a:xfrm>
           <a:prstGeom prst="rect">
@@ -7427,12 +7603,12 @@
           <a:p>
             <a:pPr algn="ctr" indent="0" marL="0">
               <a:lnSpc>
-                <a:spcPts val="1600"/>
-              </a:lnSpc>
-              <a:buNone/>
-            </a:pPr>
-            <a:r>
-              <a:rPr lang="en-US" sz="1200" dirty="0">
+                <a:spcPts val="1400"/>
+              </a:lnSpc>
+              <a:buNone/>
+            </a:pPr>
+            <a:r>
+              <a:rPr lang="en-US" sz="1100" dirty="0">
                 <a:solidFill>
                   <a:srgbClr val="94A3B8"/>
                 </a:solidFill>
@@ -7442,17 +7618,17 @@
               </a:rPr>
               <a:t>Interactive Walkthrough Highlights:</a:t>
             </a:r>
-            <a:endParaRPr lang="en-US" sz="1200" dirty="0"/>
+            <a:endParaRPr lang="en-US" sz="1100" dirty="0"/>
           </a:p>
           <a:p>
             <a:pPr algn="ctr" indent="0" marL="0">
               <a:lnSpc>
-                <a:spcPts val="1600"/>
-              </a:lnSpc>
-              <a:buNone/>
-            </a:pPr>
-            <a:r>
-              <a:rPr lang="en-US" sz="1200" dirty="0">
+                <a:spcPts val="1400"/>
+              </a:lnSpc>
+              <a:buNone/>
+            </a:pPr>
+            <a:r>
+              <a:rPr lang="en-US" sz="1100" dirty="0">
                 <a:solidFill>
                   <a:srgbClr val="94A3B8"/>
                 </a:solidFill>
@@ -7462,7 +7638,55 @@
               </a:rPr>
               <a:t>Dashboard Navigation • Dynamic AI Textbook Hinglish Explanations • Leitner Box Recalls • Peer Chat</a:t>
             </a:r>
-            <a:endParaRPr lang="en-US" sz="1200" dirty="0"/>
+            <a:endParaRPr lang="en-US" sz="1100" dirty="0"/>
+          </a:p>
+        </p:txBody>
+      </p:sp>
+      <p:sp>
+        <p:nvSpPr>
+          <p:cNvPr id="10" name="Text 8">
+            <a:hlinkClick r:id="rId1" tooltip=""/>
+          </p:cNvPr>
+          <p:cNvSpPr/>
+          <p:nvPr/>
+        </p:nvSpPr>
+        <p:spPr>
+          <a:xfrm>
+            <a:off x="2286000" y="5486400"/>
+            <a:ext cx="7616952" cy="320040"/>
+          </a:xfrm>
+          <a:prstGeom prst="rect">
+            <a:avLst/>
+          </a:prstGeom>
+          <a:noFill/>
+          <a:ln/>
+        </p:spPr>
+        <p:txBody>
+          <a:bodyPr wrap="square" rtlCol="0" anchor="ctr"/>
+          <a:lstStyle/>
+          <a:p>
+            <a:pPr algn="ctr" indent="0" marL="0">
+              <a:buNone/>
+            </a:pPr>
+            <a:r>
+              <a:rPr lang="en-US" sz="1400" b="1" u="sng" dirty="0">
+                <a:solidFill>
+                  <a:srgbClr val="10B981"/>
+                </a:solidFill>
+                <a:latin typeface="Arial" pitchFamily="34" charset="0"/>
+                <a:ea typeface="Arial" pitchFamily="34" charset="-122"/>
+                <a:cs typeface="Arial" pitchFamily="34" charset="-120"/>
+                <a:hlinkClick r:id="rId1" invalidUrl="" action="" tgtFrame="" tooltip="" history="1" highlightClick="0" endSnd="0">
+                  <a:extLst>
+                    <a:ext uri="{A12FA001-AC4F-418D-AE19-62706E023703}">
+                      <ahyp:hlinkClr xmlns:ahyp="http://schemas.microsoft.com/office/drawing/2018/hyperlinkcolor" val="tx"/>
+                    </a:ext>
+                  </a:extLst>
+                </a:hlinkClick>
+              </a:rPr>
+              <a:t>Access Live Application: https://edutrack.app</a:t>
+            </a:r>
+            <a:endParaRPr lang="en-US" sz="1400" dirty="0"/>
           </a:p>
         </p:txBody>
       </p:sp>
@@ -8252,6 +8476,579 @@
               <a:t>• Modular Hook wrapper: Easily callable in NCERT textbooks (+50 XP), flashcard spaced review box promotions (+15 XP), or PYQ assessments.</a:t>
             </a:r>
             <a:endParaRPr lang="en-US" sz="1150" dirty="0"/>
+          </a:p>
+        </p:txBody>
+      </p:sp>
+    </p:spTree>
+  </p:cSld>
+  <p:clrMapOvr>
+    <a:masterClrMapping/>
+  </p:clrMapOvr>
+</p:sld>
+</file>
+
+<file path=ppt/slides/slide9.xml><?xml version="1.0" encoding="utf-8"?>
+<p:sld xmlns:a="http://schemas.openxmlformats.org/drawingml/2006/main" xmlns:r="http://schemas.openxmlformats.org/officeDocument/2006/relationships" xmlns:p="http://schemas.openxmlformats.org/presentationml/2006/main">
+  <p:cSld name="Slide 9">
+    <p:bg>
+      <p:bgPr>
+        <a:solidFill>
+          <a:srgbClr val="03050C"/>
+        </a:solidFill>
+      </p:bgPr>
+    </p:bg>
+    <p:spTree>
+      <p:nvGrpSpPr>
+        <p:cNvPr id="1" name=""/>
+        <p:cNvGrpSpPr/>
+        <p:nvPr/>
+      </p:nvGrpSpPr>
+      <p:grpSpPr>
+        <a:xfrm>
+          <a:off x="0" y="0"/>
+          <a:ext cx="0" cy="0"/>
+          <a:chOff x="0" y="0"/>
+          <a:chExt cx="0" cy="0"/>
+        </a:xfrm>
+      </p:grpSpPr>
+      <p:sp>
+        <p:nvSpPr>
+          <p:cNvPr id="2" name="Text 0"/>
+          <p:cNvSpPr/>
+          <p:nvPr/>
+        </p:nvSpPr>
+        <p:spPr>
+          <a:xfrm>
+            <a:off x="457200" y="365760"/>
+            <a:ext cx="8229600" cy="548640"/>
+          </a:xfrm>
+          <a:prstGeom prst="rect">
+            <a:avLst/>
+          </a:prstGeom>
+          <a:noFill/>
+          <a:ln/>
+        </p:spPr>
+        <p:txBody>
+          <a:bodyPr wrap="square" rtlCol="0" anchor="ctr"/>
+          <a:lstStyle/>
+          <a:p>
+            <a:pPr indent="0" marL="0">
+              <a:buNone/>
+            </a:pPr>
+            <a:r>
+              <a:rPr lang="en-US" sz="2800" b="1" dirty="0">
+                <a:solidFill>
+                  <a:srgbClr val="FFFFFF"/>
+                </a:solidFill>
+                <a:latin typeface="Arial" pitchFamily="34" charset="0"/>
+                <a:ea typeface="Arial" pitchFamily="34" charset="-122"/>
+                <a:cs typeface="Arial" pitchFamily="34" charset="-120"/>
+              </a:rPr>
+              <a:t>Project Access &amp; Codebase</a:t>
+            </a:r>
+            <a:endParaRPr lang="en-US" sz="2800" dirty="0"/>
+          </a:p>
+        </p:txBody>
+      </p:sp>
+      <p:sp>
+        <p:nvSpPr>
+          <p:cNvPr id="3" name="Shape 1"/>
+          <p:cNvSpPr/>
+          <p:nvPr/>
+        </p:nvSpPr>
+        <p:spPr>
+          <a:xfrm>
+            <a:off x="457200" y="1005840"/>
+            <a:ext cx="11274552" cy="18288"/>
+          </a:xfrm>
+          <a:prstGeom prst="rect">
+            <a:avLst/>
+          </a:prstGeom>
+          <a:solidFill>
+            <a:srgbClr val="6366F1"/>
+          </a:solidFill>
+          <a:ln/>
+        </p:spPr>
+      </p:sp>
+      <p:sp>
+        <p:nvSpPr>
+          <p:cNvPr id="4" name="Shape 2"/>
+          <p:cNvSpPr/>
+          <p:nvPr/>
+        </p:nvSpPr>
+        <p:spPr>
+          <a:xfrm>
+            <a:off x="457200" y="1371600"/>
+            <a:ext cx="5486400" cy="4754880"/>
+          </a:xfrm>
+          <a:prstGeom prst="roundRect">
+            <a:avLst/>
+          </a:prstGeom>
+          <a:solidFill>
+            <a:srgbClr val="0C0F1D"/>
+          </a:solidFill>
+          <a:ln w="19050">
+            <a:solidFill>
+              <a:srgbClr val="252B44"/>
+            </a:solidFill>
+            <a:prstDash val="solid"/>
+          </a:ln>
+        </p:spPr>
+      </p:sp>
+      <p:sp>
+        <p:nvSpPr>
+          <p:cNvPr id="5" name="Text 3"/>
+          <p:cNvSpPr/>
+          <p:nvPr/>
+        </p:nvSpPr>
+        <p:spPr>
+          <a:xfrm>
+            <a:off x="731520" y="1645920"/>
+            <a:ext cx="4937760" cy="365760"/>
+          </a:xfrm>
+          <a:prstGeom prst="rect">
+            <a:avLst/>
+          </a:prstGeom>
+          <a:noFill/>
+          <a:ln/>
+        </p:spPr>
+        <p:txBody>
+          <a:bodyPr wrap="square" rtlCol="0" anchor="ctr"/>
+          <a:lstStyle/>
+          <a:p>
+            <a:pPr indent="0" marL="0">
+              <a:buNone/>
+            </a:pPr>
+            <a:r>
+              <a:rPr lang="en-US" sz="2200" b="1" dirty="0">
+                <a:solidFill>
+                  <a:srgbClr val="10B981"/>
+                </a:solidFill>
+                <a:latin typeface="Arial" pitchFamily="34" charset="0"/>
+                <a:ea typeface="Arial" pitchFamily="34" charset="-122"/>
+                <a:cs typeface="Arial" pitchFamily="34" charset="-120"/>
+              </a:rPr>
+              <a:t>Live Deployed Platform</a:t>
+            </a:r>
+            <a:endParaRPr lang="en-US" sz="2200" dirty="0"/>
+          </a:p>
+        </p:txBody>
+      </p:sp>
+      <p:sp>
+        <p:nvSpPr>
+          <p:cNvPr id="6" name="Text 4">
+            <a:hlinkClick r:id="rId1" tooltip=""/>
+          </p:cNvPr>
+          <p:cNvSpPr/>
+          <p:nvPr/>
+        </p:nvSpPr>
+        <p:spPr>
+          <a:xfrm>
+            <a:off x="731520" y="2103120"/>
+            <a:ext cx="4937760" cy="457200"/>
+          </a:xfrm>
+          <a:prstGeom prst="rect">
+            <a:avLst/>
+          </a:prstGeom>
+          <a:noFill/>
+          <a:ln/>
+        </p:spPr>
+        <p:txBody>
+          <a:bodyPr wrap="square" rtlCol="0" anchor="ctr"/>
+          <a:lstStyle/>
+          <a:p>
+            <a:pPr indent="0" marL="0">
+              <a:buNone/>
+            </a:pPr>
+            <a:r>
+              <a:rPr lang="en-US" sz="2000" b="1" u="sng" dirty="0">
+                <a:solidFill>
+                  <a:srgbClr val="6366F1"/>
+                </a:solidFill>
+                <a:latin typeface="Arial" pitchFamily="34" charset="0"/>
+                <a:ea typeface="Arial" pitchFamily="34" charset="-122"/>
+                <a:cs typeface="Arial" pitchFamily="34" charset="-120"/>
+                <a:hlinkClick r:id="rId1" invalidUrl="" action="" tgtFrame="" tooltip="" history="1" highlightClick="0" endSnd="0">
+                  <a:extLst>
+                    <a:ext uri="{A12FA001-AC4F-418D-AE19-62706E023703}">
+                      <ahyp:hlinkClr xmlns:ahyp="http://schemas.microsoft.com/office/drawing/2018/hyperlinkcolor" val="tx"/>
+                    </a:ext>
+                  </a:extLst>
+                </a:hlinkClick>
+              </a:rPr>
+              <a:t>https://edutrack.app</a:t>
+            </a:r>
+            <a:endParaRPr lang="en-US" sz="2000" dirty="0"/>
+          </a:p>
+        </p:txBody>
+      </p:sp>
+      <p:sp>
+        <p:nvSpPr>
+          <p:cNvPr id="7" name="Text 5"/>
+          <p:cNvSpPr/>
+          <p:nvPr/>
+        </p:nvSpPr>
+        <p:spPr>
+          <a:xfrm>
+            <a:off x="731520" y="2743200"/>
+            <a:ext cx="4937760" cy="2926080"/>
+          </a:xfrm>
+          <a:prstGeom prst="rect">
+            <a:avLst/>
+          </a:prstGeom>
+          <a:noFill/>
+          <a:ln/>
+        </p:spPr>
+        <p:txBody>
+          <a:bodyPr wrap="square" rtlCol="0" anchor="ctr"/>
+          <a:lstStyle/>
+          <a:p>
+            <a:pPr indent="0" marL="0">
+              <a:lnSpc>
+                <a:spcPts val="1800"/>
+              </a:lnSpc>
+              <a:buNone/>
+            </a:pPr>
+            <a:r>
+              <a:rPr lang="en-US" sz="1250" dirty="0">
+                <a:solidFill>
+                  <a:srgbClr val="FFFFFF"/>
+                </a:solidFill>
+                <a:latin typeface="Arial" pitchFamily="34" charset="0"/>
+                <a:ea typeface="Arial" pitchFamily="34" charset="-122"/>
+                <a:cs typeface="Arial" pitchFamily="34" charset="-120"/>
+              </a:rPr>
+              <a:t>• Production URL: Deployed to cloud infrastructure for low-latency delivery.</a:t>
+            </a:r>
+            <a:endParaRPr lang="en-US" sz="1250" dirty="0"/>
+          </a:p>
+          <a:p>
+            <a:pPr indent="0" marL="0">
+              <a:lnSpc>
+                <a:spcPts val="1800"/>
+              </a:lnSpc>
+              <a:buNone/>
+            </a:pPr>
+            <a:endParaRPr lang="en-US" sz="1250" dirty="0"/>
+          </a:p>
+          <a:p>
+            <a:pPr indent="0" marL="0">
+              <a:lnSpc>
+                <a:spcPts val="1800"/>
+              </a:lnSpc>
+              <a:buNone/>
+            </a:pPr>
+            <a:r>
+              <a:rPr lang="en-US" sz="1250" dirty="0">
+                <a:solidFill>
+                  <a:srgbClr val="FFFFFF"/>
+                </a:solidFill>
+                <a:latin typeface="Arial" pitchFamily="34" charset="0"/>
+                <a:ea typeface="Arial" pitchFamily="34" charset="-122"/>
+                <a:cs typeface="Arial" pitchFamily="34" charset="-120"/>
+              </a:rPr>
+              <a:t>• Fully Responsive: Optimized for desktops, tablets, and smart boards in classrooms.</a:t>
+            </a:r>
+            <a:endParaRPr lang="en-US" sz="1250" dirty="0"/>
+          </a:p>
+          <a:p>
+            <a:pPr indent="0" marL="0">
+              <a:lnSpc>
+                <a:spcPts val="1800"/>
+              </a:lnSpc>
+              <a:buNone/>
+            </a:pPr>
+            <a:endParaRPr lang="en-US" sz="1250" dirty="0"/>
+          </a:p>
+          <a:p>
+            <a:pPr indent="0" marL="0">
+              <a:lnSpc>
+                <a:spcPts val="1800"/>
+              </a:lnSpc>
+              <a:buNone/>
+            </a:pPr>
+            <a:r>
+              <a:rPr lang="en-US" sz="1250" dirty="0">
+                <a:solidFill>
+                  <a:srgbClr val="FFFFFF"/>
+                </a:solidFill>
+                <a:latin typeface="Arial" pitchFamily="34" charset="0"/>
+                <a:ea typeface="Arial" pitchFamily="34" charset="-122"/>
+                <a:cs typeface="Arial" pitchFamily="34" charset="-120"/>
+              </a:rPr>
+              <a:t>• Firebase Integration: Handles secure real-time authentication and synchronized peer sessions seamlessly.</a:t>
+            </a:r>
+            <a:endParaRPr lang="en-US" sz="1250" dirty="0"/>
+          </a:p>
+          <a:p>
+            <a:pPr indent="0" marL="0">
+              <a:lnSpc>
+                <a:spcPts val="1800"/>
+              </a:lnSpc>
+              <a:buNone/>
+            </a:pPr>
+            <a:endParaRPr lang="en-US" sz="1250" dirty="0"/>
+          </a:p>
+          <a:p>
+            <a:pPr indent="0" marL="0">
+              <a:lnSpc>
+                <a:spcPts val="1800"/>
+              </a:lnSpc>
+              <a:buNone/>
+            </a:pPr>
+            <a:r>
+              <a:rPr lang="en-US" sz="1250" dirty="0">
+                <a:solidFill>
+                  <a:srgbClr val="FFFFFF"/>
+                </a:solidFill>
+                <a:latin typeface="Arial" pitchFamily="34" charset="0"/>
+                <a:ea typeface="Arial" pitchFamily="34" charset="-122"/>
+                <a:cs typeface="Arial" pitchFamily="34" charset="-120"/>
+              </a:rPr>
+              <a:t>• Ready to Test: Create a free account or login to explore AI tutors, homework lens scanner, Leitner cards, and collaborative whiteboard.</a:t>
+            </a:r>
+            <a:endParaRPr lang="en-US" sz="1250" dirty="0"/>
+          </a:p>
+        </p:txBody>
+      </p:sp>
+      <p:sp>
+        <p:nvSpPr>
+          <p:cNvPr id="8" name="Shape 6"/>
+          <p:cNvSpPr/>
+          <p:nvPr/>
+        </p:nvSpPr>
+        <p:spPr>
+          <a:xfrm>
+            <a:off x="6217920" y="1371600"/>
+            <a:ext cx="5486400" cy="4754880"/>
+          </a:xfrm>
+          <a:prstGeom prst="roundRect">
+            <a:avLst/>
+          </a:prstGeom>
+          <a:solidFill>
+            <a:srgbClr val="0C0F1D"/>
+          </a:solidFill>
+          <a:ln w="19050">
+            <a:solidFill>
+              <a:srgbClr val="252B44"/>
+            </a:solidFill>
+            <a:prstDash val="solid"/>
+          </a:ln>
+        </p:spPr>
+      </p:sp>
+      <p:sp>
+        <p:nvSpPr>
+          <p:cNvPr id="9" name="Text 7"/>
+          <p:cNvSpPr/>
+          <p:nvPr/>
+        </p:nvSpPr>
+        <p:spPr>
+          <a:xfrm>
+            <a:off x="6492240" y="1645920"/>
+            <a:ext cx="4937760" cy="365760"/>
+          </a:xfrm>
+          <a:prstGeom prst="rect">
+            <a:avLst/>
+          </a:prstGeom>
+          <a:noFill/>
+          <a:ln/>
+        </p:spPr>
+        <p:txBody>
+          <a:bodyPr wrap="square" rtlCol="0" anchor="ctr"/>
+          <a:lstStyle/>
+          <a:p>
+            <a:pPr indent="0" marL="0">
+              <a:buNone/>
+            </a:pPr>
+            <a:r>
+              <a:rPr lang="en-US" sz="2200" b="1" dirty="0">
+                <a:solidFill>
+                  <a:srgbClr val="F59E0B"/>
+                </a:solidFill>
+                <a:latin typeface="Arial" pitchFamily="34" charset="0"/>
+                <a:ea typeface="Arial" pitchFamily="34" charset="-122"/>
+                <a:cs typeface="Arial" pitchFamily="34" charset="-120"/>
+              </a:rPr>
+              <a:t>GitHub Repository</a:t>
+            </a:r>
+            <a:endParaRPr lang="en-US" sz="2200" dirty="0"/>
+          </a:p>
+        </p:txBody>
+      </p:sp>
+      <p:sp>
+        <p:nvSpPr>
+          <p:cNvPr id="10" name="Text 8">
+            <a:hlinkClick r:id="rId2" tooltip=""/>
+          </p:cNvPr>
+          <p:cNvSpPr/>
+          <p:nvPr/>
+        </p:nvSpPr>
+        <p:spPr>
+          <a:xfrm>
+            <a:off x="6492240" y="2103120"/>
+            <a:ext cx="4937760" cy="457200"/>
+          </a:xfrm>
+          <a:prstGeom prst="rect">
+            <a:avLst/>
+          </a:prstGeom>
+          <a:noFill/>
+          <a:ln/>
+        </p:spPr>
+        <p:txBody>
+          <a:bodyPr wrap="square" rtlCol="0" anchor="ctr"/>
+          <a:lstStyle/>
+          <a:p>
+            <a:pPr indent="0" marL="0">
+              <a:buNone/>
+            </a:pPr>
+            <a:r>
+              <a:rPr lang="en-US" sz="2000" b="1" u="sng" dirty="0">
+                <a:solidFill>
+                  <a:srgbClr val="6366F1"/>
+                </a:solidFill>
+                <a:latin typeface="Arial" pitchFamily="34" charset="0"/>
+                <a:ea typeface="Arial" pitchFamily="34" charset="-122"/>
+                <a:cs typeface="Arial" pitchFamily="34" charset="-120"/>
+                <a:hlinkClick r:id="rId2" invalidUrl="" action="" tgtFrame="" tooltip="" history="1" highlightClick="0" endSnd="0">
+                  <a:extLst>
+                    <a:ext uri="{A12FA001-AC4F-418D-AE19-62706E023703}">
+                      <ahyp:hlinkClr xmlns:ahyp="http://schemas.microsoft.com/office/drawing/2018/hyperlinkcolor" val="tx"/>
+                    </a:ext>
+                  </a:extLst>
+                </a:hlinkClick>
+              </a:rPr>
+              <a:t>GitHub Codebase Link</a:t>
+            </a:r>
+            <a:endParaRPr lang="en-US" sz="2000" dirty="0"/>
+          </a:p>
+        </p:txBody>
+      </p:sp>
+      <p:sp>
+        <p:nvSpPr>
+          <p:cNvPr id="11" name="Text 9"/>
+          <p:cNvSpPr/>
+          <p:nvPr/>
+        </p:nvSpPr>
+        <p:spPr>
+          <a:xfrm>
+            <a:off x="6492240" y="2743200"/>
+            <a:ext cx="4937760" cy="2926080"/>
+          </a:xfrm>
+          <a:prstGeom prst="rect">
+            <a:avLst/>
+          </a:prstGeom>
+          <a:noFill/>
+          <a:ln/>
+        </p:spPr>
+        <p:txBody>
+          <a:bodyPr wrap="square" rtlCol="0" anchor="ctr"/>
+          <a:lstStyle/>
+          <a:p>
+            <a:pPr indent="0" marL="0">
+              <a:lnSpc>
+                <a:spcPts val="1800"/>
+              </a:lnSpc>
+              <a:buNone/>
+            </a:pPr>
+            <a:r>
+              <a:rPr lang="en-US" sz="1250" dirty="0">
+                <a:solidFill>
+                  <a:srgbClr val="FFFFFF"/>
+                </a:solidFill>
+                <a:latin typeface="Arial" pitchFamily="34" charset="0"/>
+                <a:ea typeface="Arial" pitchFamily="34" charset="-122"/>
+                <a:cs typeface="Arial" pitchFamily="34" charset="-120"/>
+              </a:rPr>
+              <a:t>• Version Control: Hosted on GitHub with comprehensive commit logs.</a:t>
+            </a:r>
+            <a:endParaRPr lang="en-US" sz="1250" dirty="0"/>
+          </a:p>
+          <a:p>
+            <a:pPr indent="0" marL="0">
+              <a:lnSpc>
+                <a:spcPts val="1800"/>
+              </a:lnSpc>
+              <a:buNone/>
+            </a:pPr>
+            <a:endParaRPr lang="en-US" sz="1250" dirty="0"/>
+          </a:p>
+          <a:p>
+            <a:pPr indent="0" marL="0">
+              <a:lnSpc>
+                <a:spcPts val="1800"/>
+              </a:lnSpc>
+              <a:buNone/>
+            </a:pPr>
+            <a:r>
+              <a:rPr lang="en-US" sz="1250" dirty="0">
+                <a:solidFill>
+                  <a:srgbClr val="FFFFFF"/>
+                </a:solidFill>
+                <a:latin typeface="Arial" pitchFamily="34" charset="0"/>
+                <a:ea typeface="Arial" pitchFamily="34" charset="-122"/>
+                <a:cs typeface="Arial" pitchFamily="34" charset="-120"/>
+              </a:rPr>
+              <a:t>• Technology Highlights: Next.js 14 App Router, TypeScript, Tailwind CSS, and custom AI prompt pipelines.</a:t>
+            </a:r>
+            <a:endParaRPr lang="en-US" sz="1250" dirty="0"/>
+          </a:p>
+          <a:p>
+            <a:pPr indent="0" marL="0">
+              <a:lnSpc>
+                <a:spcPts val="1800"/>
+              </a:lnSpc>
+              <a:buNone/>
+            </a:pPr>
+            <a:endParaRPr lang="en-US" sz="1250" dirty="0"/>
+          </a:p>
+          <a:p>
+            <a:pPr indent="0" marL="0">
+              <a:lnSpc>
+                <a:spcPts val="1800"/>
+              </a:lnSpc>
+              <a:buNone/>
+            </a:pPr>
+            <a:r>
+              <a:rPr lang="en-US" sz="1250" dirty="0">
+                <a:solidFill>
+                  <a:srgbClr val="FFFFFF"/>
+                </a:solidFill>
+                <a:latin typeface="Arial" pitchFamily="34" charset="0"/>
+                <a:ea typeface="Arial" pitchFamily="34" charset="-122"/>
+                <a:cs typeface="Arial" pitchFamily="34" charset="-120"/>
+              </a:rPr>
+              <a:t>• Setup Guide: Comprehensive README.md file detailing local compilation commands and environment variables setup.</a:t>
+            </a:r>
+            <a:endParaRPr lang="en-US" sz="1250" dirty="0"/>
+          </a:p>
+          <a:p>
+            <a:pPr indent="0" marL="0">
+              <a:lnSpc>
+                <a:spcPts val="1800"/>
+              </a:lnSpc>
+              <a:buNone/>
+            </a:pPr>
+            <a:endParaRPr lang="en-US" sz="1250" dirty="0"/>
+          </a:p>
+          <a:p>
+            <a:pPr indent="0" marL="0">
+              <a:lnSpc>
+                <a:spcPts val="1800"/>
+              </a:lnSpc>
+              <a:buNone/>
+            </a:pPr>
+            <a:r>
+              <a:rPr lang="en-US" sz="1250" dirty="0">
+                <a:solidFill>
+                  <a:srgbClr val="FFFFFF"/>
+                </a:solidFill>
+                <a:latin typeface="Arial" pitchFamily="34" charset="0"/>
+                <a:ea typeface="Arial" pitchFamily="34" charset="-122"/>
+                <a:cs typeface="Arial" pitchFamily="34" charset="-120"/>
+              </a:rPr>
+              <a:t>• Modular Design: Clean file structures split by concerns (components, state context hooks, local engines, database adapters).</a:t>
+            </a:r>
+            <a:endParaRPr lang="en-US" sz="1250" dirty="0"/>
           </a:p>
         </p:txBody>
       </p:sp>

--- a/Submission/EduTrack_Presentation_Fixed.pptx
+++ b/Submission/EduTrack_Presentation_Fixed.pptx
@@ -2174,7 +2174,7 @@
                   </a:extLst>
                 </a:hlinkClick>
               </a:rPr>
-              <a:t>https://edutrack.app</a:t>
+              <a:t>https://edutrack-delta-drab.vercel.app</a:t>
             </a:r>
             <a:endParaRPr lang="en-US" sz="1600" dirty="0"/>
           </a:p>
@@ -7684,7 +7684,7 @@
                   </a:extLst>
                 </a:hlinkClick>
               </a:rPr>
-              <a:t>Access Live Application: https://edutrack.app</a:t>
+              <a:t>Access Live Application: https://edutrack-delta-drab.vercel.app</a:t>
             </a:r>
             <a:endParaRPr lang="en-US" sz="1400" dirty="0"/>
           </a:p>
@@ -8676,7 +8676,7 @@
                   </a:extLst>
                 </a:hlinkClick>
               </a:rPr>
-              <a:t>https://edutrack.app</a:t>
+              <a:t>https://edutrack-delta-drab.vercel.app</a:t>
             </a:r>
             <a:endParaRPr lang="en-US" sz="2000" dirty="0"/>
           </a:p>

--- a/Submission/EduTrack_Presentation_Fixed.pptx
+++ b/Submission/EduTrack_Presentation_Fixed.pptx
@@ -4,6 +4,9 @@
   <p:sldMasterIdLst>
     <p:sldMasterId id="2147483648" r:id="rId1"/>
   </p:sldMasterIdLst>
+  <p:notesMasterIdLst>
+    <p:notesMasterId r:id="rId11"/>
+  </p:notesMasterIdLst>
   <p:sldIdLst>
     <p:sldId id="256" r:id="rId2"/>
     <p:sldId id="257" r:id="rId3"/>
@@ -15,9 +18,6 @@
     <p:sldId id="263" r:id="rId9"/>
     <p:sldId id="264" r:id="rId10"/>
   </p:sldIdLst>
-  <p:notesMasterIdLst>
-    <p:notesMasterId r:id="rId11"/>
-  </p:notesMasterIdLst>
   <p:sldSz cx="12192000" cy="6858000"/>
   <p:notesSz cx="6858000" cy="12192000"/>
   <p:defaultTextStyle>
@@ -112,6 +112,11 @@
       </a:defRPr>
     </a:lvl9pPr>
   </p:defaultTextStyle>
+  <p:extLst>
+    <p:ext uri="{EFAFB233-063F-42B5-8137-9DF3F51BA10A}">
+      <p15:sldGuideLst xmlns:p15="http://schemas.microsoft.com/office/powerpoint/2012/main"/>
+    </p:ext>
+  </p:extLst>
 </p:presentation>
 </file>
 
@@ -137,234 +142,10 @@
           <a:chExt cx="0" cy="0"/>
         </a:xfrm>
       </p:grpSpPr>
-      <p:sp>
-        <p:nvSpPr>
-          <p:cNvPr id="2" name="Header Placeholder 1"/>
-          <p:cNvSpPr>
-            <a:spLocks noGrp="1"/>
-          </p:cNvSpPr>
-          <p:nvPr>
-            <p:ph type="hdr" sz="quarter"/>
-          </p:nvPr>
-        </p:nvSpPr>
-        <p:spPr>
-          <a:xfrm>
-            <a:off x="0" y="0"/>
-            <a:ext cx="2971800" cy="458788"/>
-          </a:xfrm>
-          <a:prstGeom prst="rect">
-            <a:avLst/>
-          </a:prstGeom>
-        </p:spPr>
-        <p:txBody>
-          <a:bodyPr vert="horz" lIns="91440" tIns="45720" rIns="91440" bIns="45720" rtlCol="0"/>
-          <a:lstStyle>
-            <a:lvl1pPr algn="l">
-              <a:defRPr sz="1200"/>
-            </a:lvl1pPr>
-          </a:lstStyle>
-          <a:p>
-            <a:endParaRPr lang="en-US"/>
-          </a:p>
-        </p:txBody>
-      </p:sp>
-      <p:sp>
-        <p:nvSpPr>
-          <p:cNvPr id="3" name="Date Placeholder 2"/>
-          <p:cNvSpPr>
-            <a:spLocks noGrp="1"/>
-          </p:cNvSpPr>
-          <p:nvPr>
-            <p:ph type="dt" idx="1"/>
-          </p:nvPr>
-        </p:nvSpPr>
-        <p:spPr>
-          <a:xfrm>
-            <a:off x="3884613" y="0"/>
-            <a:ext cx="2971800" cy="458788"/>
-          </a:xfrm>
-          <a:prstGeom prst="rect">
-            <a:avLst/>
-          </a:prstGeom>
-        </p:spPr>
-        <p:txBody>
-          <a:bodyPr vert="horz" lIns="91440" tIns="45720" rIns="91440" bIns="45720" rtlCol="0"/>
-          <a:lstStyle>
-            <a:lvl1pPr algn="r">
-              <a:defRPr sz="1200"/>
-            </a:lvl1pPr>
-          </a:lstStyle>
-          <a:p>
-            <a:fld id="{5282F153-3F37-0F45-9E97-73ACFA13230C}" type="datetimeFigureOut">
-              <a:rPr lang="en-US"/>
-              <a:t>7/23/19</a:t>
-            </a:fld>
-            <a:endParaRPr lang="en-US"/>
-          </a:p>
-        </p:txBody>
-      </p:sp>
-      <p:sp>
-        <p:nvSpPr>
-          <p:cNvPr id="4" name="Slide Image Placeholder 3"/>
-          <p:cNvSpPr>
-            <a:spLocks noGrp="1" noRot="1" noChangeAspect="1"/>
-          </p:cNvSpPr>
-          <p:nvPr>
-            <p:ph type="sldImg" idx="2"/>
-          </p:nvPr>
-        </p:nvSpPr>
-        <p:spPr>
-          <a:xfrm>
-            <a:off x="685800" y="1143000"/>
-            <a:ext cx="5486400" cy="3086100"/>
-          </a:xfrm>
-          <a:prstGeom prst="rect">
-            <a:avLst/>
-          </a:prstGeom>
-          <a:noFill/>
-          <a:ln w="12700">
-            <a:solidFill>
-              <a:prstClr val="black"/>
-            </a:solidFill>
-          </a:ln>
-        </p:spPr>
-        <p:txBody>
-          <a:bodyPr vert="horz" lIns="91440" tIns="45720" rIns="91440" bIns="45720" rtlCol="0" anchor="ctr"/>
-          <a:lstStyle/>
-          <a:p>
-            <a:endParaRPr lang="en-US"/>
-          </a:p>
-        </p:txBody>
-      </p:sp>
-      <p:sp>
-        <p:nvSpPr>
-          <p:cNvPr id="5" name="Notes Placeholder 4"/>
-          <p:cNvSpPr>
-            <a:spLocks noGrp="1"/>
-          </p:cNvSpPr>
-          <p:nvPr>
-            <p:ph type="body" sz="quarter" idx="3"/>
-          </p:nvPr>
-        </p:nvSpPr>
-        <p:spPr>
-          <a:xfrm>
-            <a:off x="685800" y="4400550"/>
-            <a:ext cx="5486400" cy="3600450"/>
-          </a:xfrm>
-          <a:prstGeom prst="rect">
-            <a:avLst/>
-          </a:prstGeom>
-        </p:spPr>
-        <p:txBody>
-          <a:bodyPr vert="horz" lIns="91440" tIns="45720" rIns="91440" bIns="45720" rtlCol="0"/>
-          <a:lstStyle/>
-          <a:p>
-            <a:pPr lvl="0"/>
-            <a:r>
-              <a:rPr lang="en-US"/>
-              <a:t>Click to edit Master text styles</a:t>
-            </a:r>
-          </a:p>
-          <a:p>
-            <a:pPr lvl="1"/>
-            <a:r>
-              <a:rPr lang="en-US"/>
-              <a:t>Second level</a:t>
-            </a:r>
-          </a:p>
-          <a:p>
-            <a:pPr lvl="2"/>
-            <a:r>
-              <a:rPr lang="en-US"/>
-              <a:t>Third level</a:t>
-            </a:r>
-          </a:p>
-          <a:p>
-            <a:pPr lvl="3"/>
-            <a:r>
-              <a:rPr lang="en-US"/>
-              <a:t>Fourth level</a:t>
-            </a:r>
-          </a:p>
-          <a:p>
-            <a:pPr lvl="4"/>
-            <a:r>
-              <a:rPr lang="en-US"/>
-              <a:t>Fifth level</a:t>
-            </a:r>
-          </a:p>
-        </p:txBody>
-      </p:sp>
-      <p:sp>
-        <p:nvSpPr>
-          <p:cNvPr id="6" name="Footer Placeholder 5"/>
-          <p:cNvSpPr>
-            <a:spLocks noGrp="1"/>
-          </p:cNvSpPr>
-          <p:nvPr>
-            <p:ph type="ftr" sz="quarter" idx="4"/>
-          </p:nvPr>
-        </p:nvSpPr>
-        <p:spPr>
-          <a:xfrm>
-            <a:off x="0" y="8685213"/>
-            <a:ext cx="2971800" cy="458787"/>
-          </a:xfrm>
-          <a:prstGeom prst="rect">
-            <a:avLst/>
-          </a:prstGeom>
-        </p:spPr>
-        <p:txBody>
-          <a:bodyPr vert="horz" lIns="91440" tIns="45720" rIns="91440" bIns="45720" rtlCol="0" anchor="b"/>
-          <a:lstStyle>
-            <a:lvl1pPr algn="l">
-              <a:defRPr sz="1200"/>
-            </a:lvl1pPr>
-          </a:lstStyle>
-          <a:p>
-            <a:endParaRPr lang="en-US"/>
-          </a:p>
-        </p:txBody>
-      </p:sp>
-      <p:sp>
-        <p:nvSpPr>
-          <p:cNvPr id="7" name="Slide Number Placeholder 6"/>
-          <p:cNvSpPr>
-            <a:spLocks noGrp="1"/>
-          </p:cNvSpPr>
-          <p:nvPr>
-            <p:ph type="sldNum" sz="quarter" idx="5"/>
-          </p:nvPr>
-        </p:nvSpPr>
-        <p:spPr>
-          <a:xfrm>
-            <a:off x="3884613" y="8685213"/>
-            <a:ext cx="2971800" cy="458787"/>
-          </a:xfrm>
-          <a:prstGeom prst="rect">
-            <a:avLst/>
-          </a:prstGeom>
-        </p:spPr>
-        <p:txBody>
-          <a:bodyPr vert="horz" lIns="91440" tIns="45720" rIns="91440" bIns="45720" rtlCol="0" anchor="b"/>
-          <a:lstStyle>
-            <a:lvl1pPr algn="r">
-              <a:defRPr sz="1200"/>
-            </a:lvl1pPr>
-          </a:lstStyle>
-          <a:p>
-            <a:fld id="{CE5E9CC1-C706-0F49-92D6-E571CC5EEA8F}" type="slidenum">
-              <a:rPr lang="en-US"/>
-              <a:t>‹#›</a:t>
-            </a:fld>
-            <a:endParaRPr lang="en-US"/>
-          </a:p>
-        </p:txBody>
-      </p:sp>
     </p:spTree>
     <p:extLst>
       <p:ext uri="{BB962C8B-B14F-4D97-AF65-F5344CB8AC3E}">
-        <p14:creationId xmlns:p14="http://schemas.microsoft.com/office/powerpoint/2010/main" val="1024086991"/>
+        <p14:creationId xmlns:p14="http://schemas.microsoft.com/office/powerpoint/2010/main" val="2343032551"/>
       </p:ext>
     </p:extLst>
   </p:cSld>
@@ -508,10 +289,6 @@
           <a:bodyPr/>
           <a:lstStyle/>
           <a:p>
-            <a:r>
-              <a:rPr lang="en-US" dirty="0"/>
-              <a:t/>
-            </a:r>
             <a:endParaRPr lang="en-US" dirty="0"/>
           </a:p>
         </p:txBody>
@@ -596,10 +373,6 @@
           <a:bodyPr/>
           <a:lstStyle/>
           <a:p>
-            <a:r>
-              <a:rPr lang="en-US" dirty="0"/>
-              <a:t/>
-            </a:r>
             <a:endParaRPr lang="en-US" dirty="0"/>
           </a:p>
         </p:txBody>
@@ -684,10 +457,6 @@
           <a:bodyPr/>
           <a:lstStyle/>
           <a:p>
-            <a:r>
-              <a:rPr lang="en-US" dirty="0"/>
-              <a:t/>
-            </a:r>
             <a:endParaRPr lang="en-US" dirty="0"/>
           </a:p>
         </p:txBody>
@@ -772,10 +541,6 @@
           <a:bodyPr/>
           <a:lstStyle/>
           <a:p>
-            <a:r>
-              <a:rPr lang="en-US" dirty="0"/>
-              <a:t/>
-            </a:r>
             <a:endParaRPr lang="en-US" dirty="0"/>
           </a:p>
         </p:txBody>
@@ -860,10 +625,6 @@
           <a:bodyPr/>
           <a:lstStyle/>
           <a:p>
-            <a:r>
-              <a:rPr lang="en-US" dirty="0"/>
-              <a:t/>
-            </a:r>
             <a:endParaRPr lang="en-US" dirty="0"/>
           </a:p>
         </p:txBody>
@@ -948,10 +709,6 @@
           <a:bodyPr/>
           <a:lstStyle/>
           <a:p>
-            <a:r>
-              <a:rPr lang="en-US" dirty="0"/>
-              <a:t/>
-            </a:r>
             <a:endParaRPr lang="en-US" dirty="0"/>
           </a:p>
         </p:txBody>
@@ -1036,10 +793,6 @@
           <a:bodyPr/>
           <a:lstStyle/>
           <a:p>
-            <a:r>
-              <a:rPr lang="en-US" dirty="0"/>
-              <a:t/>
-            </a:r>
             <a:endParaRPr lang="en-US" dirty="0"/>
           </a:p>
         </p:txBody>
@@ -1124,10 +877,6 @@
           <a:bodyPr/>
           <a:lstStyle/>
           <a:p>
-            <a:r>
-              <a:rPr lang="en-US" dirty="0"/>
-              <a:t/>
-            </a:r>
             <a:endParaRPr lang="en-US" dirty="0"/>
           </a:p>
         </p:txBody>
@@ -1212,10 +961,6 @@
           <a:bodyPr/>
           <a:lstStyle/>
           <a:p>
-            <a:r>
-              <a:rPr lang="en-US" dirty="0"/>
-              <a:t/>
-            </a:r>
             <a:endParaRPr lang="en-US" dirty="0"/>
           </a:p>
         </p:txBody>
@@ -1289,6 +1034,11 @@
 <file path=ppt/slideMasters/slideMaster1.xml><?xml version="1.0" encoding="utf-8"?>
 <p:sldMaster xmlns:a="http://schemas.openxmlformats.org/drawingml/2006/main" xmlns:r="http://schemas.openxmlformats.org/officeDocument/2006/relationships" xmlns:p="http://schemas.openxmlformats.org/presentationml/2006/main">
   <p:cSld>
+    <p:bg>
+      <p:bgRef idx="1001">
+        <a:schemeClr val="bg1"/>
+      </p:bgRef>
+    </p:bg>
     <p:spTree>
       <p:nvGrpSpPr>
         <p:cNvPr id="1" name=""/>
@@ -1571,6 +1321,7 @@
         <a:solidFill>
           <a:srgbClr val="03050C"/>
         </a:solidFill>
+        <a:effectLst/>
       </p:bgPr>
     </p:bg>
     <p:spTree>
@@ -1595,8 +1346,8 @@
         </p:nvSpPr>
         <p:spPr>
           <a:xfrm flipV="1">
-            <a:off x="-457200" y="-457200"/>
-            <a:ext cx="2286000" cy="2286000"/>
+            <a:off x="0" y="0"/>
+            <a:ext cx="2286000" cy="1938528"/>
           </a:xfrm>
           <a:prstGeom prst="triangle">
             <a:avLst/>
@@ -1615,7 +1366,7 @@
         </p:nvSpPr>
         <p:spPr>
           <a:xfrm flipH="1">
-            <a:off x="10360152" y="5029200"/>
+            <a:off x="9906000" y="4572000"/>
             <a:ext cx="2286000" cy="2286000"/>
           </a:xfrm>
           <a:prstGeom prst="triangle">
@@ -1648,7 +1399,7 @@
           <a:bodyPr wrap="square" rtlCol="0" anchor="ctr"/>
           <a:lstStyle/>
           <a:p>
-            <a:pPr algn="l" indent="0" marL="0">
+            <a:pPr marL="0" indent="0" algn="l">
               <a:buNone/>
             </a:pPr>
             <a:r>
@@ -1665,7 +1416,7 @@
             <a:endParaRPr lang="en-US" sz="3600" dirty="0"/>
           </a:p>
           <a:p>
-            <a:pPr algn="l" indent="0" marL="0">
+            <a:pPr marL="0" indent="0" algn="l">
               <a:buNone/>
             </a:pPr>
             <a:r>
@@ -1711,8 +1462,8 @@
         </p:nvSpPr>
         <p:spPr>
           <a:xfrm>
-            <a:off x="731520" y="3383280"/>
-            <a:ext cx="2926080" cy="365760"/>
+            <a:off x="731519" y="3383280"/>
+            <a:ext cx="3066757" cy="365760"/>
           </a:xfrm>
           <a:prstGeom prst="rect">
             <a:avLst/>
@@ -1724,7 +1475,7 @@
           <a:bodyPr wrap="square" rtlCol="0" anchor="ctr"/>
           <a:lstStyle/>
           <a:p>
-            <a:pPr indent="0" marL="0">
+            <a:pPr marL="0" indent="0">
               <a:buNone/>
             </a:pPr>
             <a:r>
@@ -1763,7 +1514,7 @@
           <a:bodyPr wrap="square" rtlCol="0" anchor="ctr"/>
           <a:lstStyle/>
           <a:p>
-            <a:pPr indent="0" marL="0">
+            <a:pPr marL="0" indent="0">
               <a:buNone/>
             </a:pPr>
             <a:r>
@@ -1775,7 +1526,40 @@
                 <a:ea typeface="Arial" pitchFamily="34" charset="-122"/>
                 <a:cs typeface="Arial" pitchFamily="34" charset="-120"/>
               </a:rPr>
-              <a:t>Personalized Learning and Adaptive Education</a:t>
+              <a:t>Personalized Learning and Adaptive </a:t>
+            </a:r>
+            <a:r>
+              <a:rPr lang="en-US" sz="1600" b="1" dirty="0" smtClean="0">
+                <a:solidFill>
+                  <a:srgbClr val="FFFFFF"/>
+                </a:solidFill>
+                <a:latin typeface="Arial" pitchFamily="34" charset="0"/>
+                <a:ea typeface="Arial" pitchFamily="34" charset="-122"/>
+                <a:cs typeface="Arial" pitchFamily="34" charset="-120"/>
+              </a:rPr>
+              <a:t>Education{Quality </a:t>
+            </a:r>
+            <a:r>
+              <a:rPr lang="en-US" sz="1600" b="1" dirty="0" err="1" smtClean="0">
+                <a:solidFill>
+                  <a:srgbClr val="FFFFFF"/>
+                </a:solidFill>
+                <a:latin typeface="Arial" pitchFamily="34" charset="0"/>
+                <a:ea typeface="Arial" pitchFamily="34" charset="-122"/>
+                <a:cs typeface="Arial" pitchFamily="34" charset="-120"/>
+              </a:rPr>
+              <a:t>Educaation</a:t>
+            </a:r>
+            <a:r>
+              <a:rPr lang="en-US" sz="1600" b="1" dirty="0" smtClean="0">
+                <a:solidFill>
+                  <a:srgbClr val="FFFFFF"/>
+                </a:solidFill>
+                <a:latin typeface="Arial" pitchFamily="34" charset="0"/>
+                <a:ea typeface="Arial" pitchFamily="34" charset="-122"/>
+                <a:cs typeface="Arial" pitchFamily="34" charset="-120"/>
+              </a:rPr>
+              <a:t>}</a:t>
             </a:r>
             <a:endParaRPr lang="en-US" sz="1600" dirty="0"/>
           </a:p>
@@ -1802,7 +1586,7 @@
           <a:bodyPr wrap="square" rtlCol="0" anchor="ctr"/>
           <a:lstStyle/>
           <a:p>
-            <a:pPr indent="0" marL="0">
+            <a:pPr marL="0" indent="0">
               <a:buNone/>
             </a:pPr>
             <a:r>
@@ -1841,7 +1625,7 @@
           <a:bodyPr wrap="square" rtlCol="0" anchor="ctr"/>
           <a:lstStyle/>
           <a:p>
-            <a:pPr indent="0" marL="0">
+            <a:pPr marL="0" indent="0">
               <a:buNone/>
             </a:pPr>
             <a:r>
@@ -1880,7 +1664,7 @@
           <a:bodyPr wrap="square" rtlCol="0" anchor="ctr"/>
           <a:lstStyle/>
           <a:p>
-            <a:pPr indent="0" marL="0">
+            <a:pPr marL="0" indent="0">
               <a:buNone/>
             </a:pPr>
             <a:r>
@@ -1919,7 +1703,7 @@
           <a:bodyPr wrap="square" rtlCol="0" anchor="ctr"/>
           <a:lstStyle/>
           <a:p>
-            <a:pPr indent="0" marL="0">
+            <a:pPr marL="0" indent="0">
               <a:buNone/>
             </a:pPr>
             <a:r>
@@ -1958,7 +1742,7 @@
           <a:bodyPr wrap="square" rtlCol="0" anchor="ctr"/>
           <a:lstStyle/>
           <a:p>
-            <a:pPr indent="0" marL="0">
+            <a:pPr marL="0" indent="0">
               <a:buNone/>
             </a:pPr>
             <a:r>
@@ -1997,11 +1781,11 @@
           <a:bodyPr wrap="square" rtlCol="0" anchor="ctr"/>
           <a:lstStyle/>
           <a:p>
-            <a:pPr indent="0" marL="0">
-              <a:buNone/>
-            </a:pPr>
-            <a:r>
-              <a:rPr lang="en-US" sz="1600" b="1" dirty="0">
+            <a:pPr marL="0" indent="0">
+              <a:buNone/>
+            </a:pPr>
+            <a:r>
+              <a:rPr lang="en-US" sz="1600" b="1" dirty="0" smtClean="0">
                 <a:solidFill>
                   <a:srgbClr val="FFFFFF"/>
                 </a:solidFill>
@@ -2009,7 +1793,40 @@
                 <a:ea typeface="Arial" pitchFamily="34" charset="-122"/>
                 <a:cs typeface="Arial" pitchFamily="34" charset="-120"/>
               </a:rPr>
-              <a:t>Suwrat Korgaonkar</a:t>
+              <a:t>Pilla Raja </a:t>
+            </a:r>
+            <a:r>
+              <a:rPr lang="en-US" sz="1600" b="1" dirty="0" err="1" smtClean="0">
+                <a:solidFill>
+                  <a:srgbClr val="FFFFFF"/>
+                </a:solidFill>
+                <a:latin typeface="Arial" pitchFamily="34" charset="0"/>
+                <a:ea typeface="Arial" pitchFamily="34" charset="-122"/>
+                <a:cs typeface="Arial" pitchFamily="34" charset="-120"/>
+              </a:rPr>
+              <a:t>Srirama</a:t>
+            </a:r>
+            <a:r>
+              <a:rPr lang="en-US" sz="1600" b="1" dirty="0" smtClean="0">
+                <a:solidFill>
+                  <a:srgbClr val="FFFFFF"/>
+                </a:solidFill>
+                <a:latin typeface="Arial" pitchFamily="34" charset="0"/>
+                <a:ea typeface="Arial" pitchFamily="34" charset="-122"/>
+                <a:cs typeface="Arial" pitchFamily="34" charset="-120"/>
+              </a:rPr>
+              <a:t> </a:t>
+            </a:r>
+            <a:r>
+              <a:rPr lang="en-US" sz="1600" b="1" dirty="0" err="1" smtClean="0">
+                <a:solidFill>
+                  <a:srgbClr val="FFFFFF"/>
+                </a:solidFill>
+                <a:latin typeface="Arial" pitchFamily="34" charset="0"/>
+                <a:ea typeface="Arial" pitchFamily="34" charset="-122"/>
+                <a:cs typeface="Arial" pitchFamily="34" charset="-120"/>
+              </a:rPr>
+              <a:t>Rameshu</a:t>
             </a:r>
             <a:endParaRPr lang="en-US" sz="1600" dirty="0"/>
           </a:p>
@@ -2036,7 +1853,7 @@
           <a:bodyPr wrap="square" rtlCol="0" anchor="ctr"/>
           <a:lstStyle/>
           <a:p>
-            <a:pPr indent="0" marL="0">
+            <a:pPr marL="0" indent="0">
               <a:buNone/>
             </a:pPr>
             <a:r>
@@ -2075,7 +1892,7 @@
           <a:bodyPr wrap="square" rtlCol="0" anchor="ctr"/>
           <a:lstStyle/>
           <a:p>
-            <a:pPr indent="0" marL="0">
+            <a:pPr marL="0" indent="0">
               <a:buNone/>
             </a:pPr>
             <a:r>
@@ -2114,7 +1931,7 @@
           <a:bodyPr wrap="square" rtlCol="0" anchor="ctr"/>
           <a:lstStyle/>
           <a:p>
-            <a:pPr indent="0" marL="0">
+            <a:pPr marL="0" indent="0">
               <a:buNone/>
             </a:pPr>
             <a:r>
@@ -2135,7 +1952,7 @@
       <p:sp>
         <p:nvSpPr>
           <p:cNvPr id="17" name="Text 15">
-            <a:hlinkClick r:id="rId1" tooltip=""/>
+            <a:hlinkClick r:id="rId3"/>
           </p:cNvPr>
           <p:cNvSpPr/>
           <p:nvPr/>
@@ -2155,7 +1972,7 @@
           <a:bodyPr wrap="square" rtlCol="0" anchor="ctr"/>
           <a:lstStyle/>
           <a:p>
-            <a:pPr indent="0" marL="0">
+            <a:pPr marL="0" indent="0">
               <a:buNone/>
             </a:pPr>
             <a:r>
@@ -2166,10 +1983,10 @@
                 <a:latin typeface="Arial" pitchFamily="34" charset="0"/>
                 <a:ea typeface="Arial" pitchFamily="34" charset="-122"/>
                 <a:cs typeface="Arial" pitchFamily="34" charset="-120"/>
-                <a:hlinkClick r:id="rId1" invalidUrl="" action="" tgtFrame="" tooltip="" history="1" highlightClick="0" endSnd="0">
+                <a:hlinkClick r:id="rId3">
                   <a:extLst>
                     <a:ext uri="{A12FA001-AC4F-418D-AE19-62706E023703}">
-                      <ahyp:hlinkClr xmlns:ahyp="http://schemas.microsoft.com/office/drawing/2018/hyperlinkcolor" val="tx"/>
+                      <ahyp:hlinkClr xmlns:ahyp="http://schemas.microsoft.com/office/drawing/2018/hyperlinkcolor" xmlns="" val="tx"/>
                     </a:ext>
                   </a:extLst>
                 </a:hlinkClick>
@@ -2196,6 +2013,7 @@
         <a:solidFill>
           <a:srgbClr val="03050C"/>
         </a:solidFill>
+        <a:effectLst/>
       </p:bgPr>
     </p:bg>
     <p:spTree>
@@ -2233,7 +2051,7 @@
           <a:bodyPr wrap="square" rtlCol="0" anchor="ctr"/>
           <a:lstStyle/>
           <a:p>
-            <a:pPr indent="0" marL="0">
+            <a:pPr marL="0" indent="0">
               <a:buNone/>
             </a:pPr>
             <a:r>
@@ -2292,7 +2110,7 @@
           <a:bodyPr wrap="square" rtlCol="0" anchor="ctr"/>
           <a:lstStyle/>
           <a:p>
-            <a:pPr indent="0" marL="0">
+            <a:pPr marL="0" indent="0">
               <a:buNone/>
             </a:pPr>
             <a:r>
@@ -2331,7 +2149,7 @@
           <a:bodyPr wrap="square" rtlCol="0" anchor="ctr"/>
           <a:lstStyle/>
           <a:p>
-            <a:pPr indent="0" marL="0">
+            <a:pPr marL="0" indent="0">
               <a:lnSpc>
                 <a:spcPts val="2200"/>
               </a:lnSpc>
@@ -2351,7 +2169,7 @@
             <a:endParaRPr lang="en-US" sz="1300" dirty="0"/>
           </a:p>
           <a:p>
-            <a:pPr indent="0" marL="0">
+            <a:pPr marL="0" indent="0">
               <a:lnSpc>
                 <a:spcPts val="2200"/>
               </a:lnSpc>
@@ -2360,7 +2178,7 @@
             <a:endParaRPr lang="en-US" sz="1300" dirty="0"/>
           </a:p>
           <a:p>
-            <a:pPr indent="0" marL="0">
+            <a:pPr marL="0" indent="0">
               <a:lnSpc>
                 <a:spcPts val="2200"/>
               </a:lnSpc>
@@ -2380,7 +2198,7 @@
             <a:endParaRPr lang="en-US" sz="1300" dirty="0"/>
           </a:p>
           <a:p>
-            <a:pPr indent="0" marL="0">
+            <a:pPr marL="0" indent="0">
               <a:lnSpc>
                 <a:spcPts val="2200"/>
               </a:lnSpc>
@@ -2389,7 +2207,7 @@
             <a:endParaRPr lang="en-US" sz="1300" dirty="0"/>
           </a:p>
           <a:p>
-            <a:pPr indent="0" marL="0">
+            <a:pPr marL="0" indent="0">
               <a:lnSpc>
                 <a:spcPts val="2200"/>
               </a:lnSpc>
@@ -2456,7 +2274,7 @@
           <a:bodyPr wrap="square" rtlCol="0" anchor="ctr"/>
           <a:lstStyle/>
           <a:p>
-            <a:pPr indent="0" marL="0">
+            <a:pPr marL="0" indent="0">
               <a:buNone/>
             </a:pPr>
             <a:r>
@@ -2495,7 +2313,7 @@
           <a:bodyPr wrap="square" rtlCol="0" anchor="ctr"/>
           <a:lstStyle/>
           <a:p>
-            <a:pPr indent="0" marL="0">
+            <a:pPr marL="0" indent="0">
               <a:lnSpc>
                 <a:spcPts val="2000"/>
               </a:lnSpc>
@@ -2515,7 +2333,7 @@
             <a:endParaRPr lang="en-US" sz="1200" dirty="0"/>
           </a:p>
           <a:p>
-            <a:pPr indent="0" marL="0">
+            <a:pPr marL="0" indent="0">
               <a:lnSpc>
                 <a:spcPts val="2000"/>
               </a:lnSpc>
@@ -2524,7 +2342,7 @@
             <a:endParaRPr lang="en-US" sz="1200" dirty="0"/>
           </a:p>
           <a:p>
-            <a:pPr indent="0" marL="0">
+            <a:pPr marL="0" indent="0">
               <a:lnSpc>
                 <a:spcPts val="2000"/>
               </a:lnSpc>
@@ -2544,7 +2362,7 @@
             <a:endParaRPr lang="en-US" sz="1200" dirty="0"/>
           </a:p>
           <a:p>
-            <a:pPr indent="0" marL="0">
+            <a:pPr marL="0" indent="0">
               <a:lnSpc>
                 <a:spcPts val="2000"/>
               </a:lnSpc>
@@ -2553,7 +2371,7 @@
             <a:endParaRPr lang="en-US" sz="1200" dirty="0"/>
           </a:p>
           <a:p>
-            <a:pPr indent="0" marL="0">
+            <a:pPr marL="0" indent="0">
               <a:lnSpc>
                 <a:spcPts val="2000"/>
               </a:lnSpc>
@@ -2573,7 +2391,7 @@
             <a:endParaRPr lang="en-US" sz="1200" dirty="0"/>
           </a:p>
           <a:p>
-            <a:pPr indent="0" marL="0">
+            <a:pPr marL="0" indent="0">
               <a:lnSpc>
                 <a:spcPts val="2000"/>
               </a:lnSpc>
@@ -2582,7 +2400,7 @@
             <a:endParaRPr lang="en-US" sz="1200" dirty="0"/>
           </a:p>
           <a:p>
-            <a:pPr indent="0" marL="0">
+            <a:pPr marL="0" indent="0">
               <a:lnSpc>
                 <a:spcPts val="2000"/>
               </a:lnSpc>
@@ -2619,6 +2437,7 @@
         <a:solidFill>
           <a:srgbClr val="03050C"/>
         </a:solidFill>
+        <a:effectLst/>
       </p:bgPr>
     </p:bg>
     <p:spTree>
@@ -2656,7 +2475,7 @@
           <a:bodyPr wrap="square" rtlCol="0" anchor="ctr"/>
           <a:lstStyle/>
           <a:p>
-            <a:pPr indent="0" marL="0">
+            <a:pPr marL="0" indent="0">
               <a:buNone/>
             </a:pPr>
             <a:r>
@@ -2760,7 +2579,7 @@
           <a:bodyPr wrap="square" rtlCol="0" anchor="ctr"/>
           <a:lstStyle/>
           <a:p>
-            <a:pPr algn="ctr" indent="0" marL="0">
+            <a:pPr marL="0" indent="0" algn="ctr">
               <a:buNone/>
             </a:pPr>
             <a:r>
@@ -2799,7 +2618,7 @@
           <a:bodyPr wrap="square" rtlCol="0" anchor="ctr"/>
           <a:lstStyle/>
           <a:p>
-            <a:pPr algn="ctr" indent="0" marL="0">
+            <a:pPr marL="0" indent="0" algn="ctr">
               <a:buNone/>
             </a:pPr>
             <a:r>
@@ -2838,7 +2657,7 @@
           <a:bodyPr wrap="square" rtlCol="0" anchor="ctr"/>
           <a:lstStyle/>
           <a:p>
-            <a:pPr algn="ctr" indent="0" marL="0">
+            <a:pPr marL="0" indent="0" algn="ctr">
               <a:lnSpc>
                 <a:spcPts val="1600"/>
               </a:lnSpc>
@@ -2880,7 +2699,7 @@
           <a:bodyPr wrap="square" rtlCol="0" anchor="ctr"/>
           <a:lstStyle/>
           <a:p>
-            <a:pPr algn="ctr" indent="0" marL="0">
+            <a:pPr marL="0" indent="0" algn="ctr">
               <a:buNone/>
             </a:pPr>
             <a:r>
@@ -2961,7 +2780,7 @@
           <a:bodyPr wrap="square" rtlCol="0" anchor="ctr"/>
           <a:lstStyle/>
           <a:p>
-            <a:pPr algn="ctr" indent="0" marL="0">
+            <a:pPr marL="0" indent="0" algn="ctr">
               <a:buNone/>
             </a:pPr>
             <a:r>
@@ -3000,7 +2819,7 @@
           <a:bodyPr wrap="square" rtlCol="0" anchor="ctr"/>
           <a:lstStyle/>
           <a:p>
-            <a:pPr algn="ctr" indent="0" marL="0">
+            <a:pPr marL="0" indent="0" algn="ctr">
               <a:buNone/>
             </a:pPr>
             <a:r>
@@ -3039,7 +2858,7 @@
           <a:bodyPr wrap="square" rtlCol="0" anchor="ctr"/>
           <a:lstStyle/>
           <a:p>
-            <a:pPr algn="ctr" indent="0" marL="0">
+            <a:pPr marL="0" indent="0" algn="ctr">
               <a:lnSpc>
                 <a:spcPts val="1600"/>
               </a:lnSpc>
@@ -3081,7 +2900,7 @@
           <a:bodyPr wrap="square" rtlCol="0" anchor="ctr"/>
           <a:lstStyle/>
           <a:p>
-            <a:pPr algn="ctr" indent="0" marL="0">
+            <a:pPr marL="0" indent="0" algn="ctr">
               <a:buNone/>
             </a:pPr>
             <a:r>
@@ -3162,7 +2981,7 @@
           <a:bodyPr wrap="square" rtlCol="0" anchor="ctr"/>
           <a:lstStyle/>
           <a:p>
-            <a:pPr algn="ctr" indent="0" marL="0">
+            <a:pPr marL="0" indent="0" algn="ctr">
               <a:buNone/>
             </a:pPr>
             <a:r>
@@ -3201,7 +3020,7 @@
           <a:bodyPr wrap="square" rtlCol="0" anchor="ctr"/>
           <a:lstStyle/>
           <a:p>
-            <a:pPr algn="ctr" indent="0" marL="0">
+            <a:pPr marL="0" indent="0" algn="ctr">
               <a:buNone/>
             </a:pPr>
             <a:r>
@@ -3240,7 +3059,7 @@
           <a:bodyPr wrap="square" rtlCol="0" anchor="ctr"/>
           <a:lstStyle/>
           <a:p>
-            <a:pPr algn="ctr" indent="0" marL="0">
+            <a:pPr marL="0" indent="0" algn="ctr">
               <a:lnSpc>
                 <a:spcPts val="1600"/>
               </a:lnSpc>
@@ -3282,7 +3101,7 @@
           <a:bodyPr wrap="square" rtlCol="0" anchor="ctr"/>
           <a:lstStyle/>
           <a:p>
-            <a:pPr algn="ctr" indent="0" marL="0">
+            <a:pPr marL="0" indent="0" algn="ctr">
               <a:buNone/>
             </a:pPr>
             <a:r>
@@ -3363,7 +3182,7 @@
           <a:bodyPr wrap="square" rtlCol="0" anchor="ctr"/>
           <a:lstStyle/>
           <a:p>
-            <a:pPr algn="ctr" indent="0" marL="0">
+            <a:pPr marL="0" indent="0" algn="ctr">
               <a:buNone/>
             </a:pPr>
             <a:r>
@@ -3402,7 +3221,7 @@
           <a:bodyPr wrap="square" rtlCol="0" anchor="ctr"/>
           <a:lstStyle/>
           <a:p>
-            <a:pPr algn="ctr" indent="0" marL="0">
+            <a:pPr marL="0" indent="0" algn="ctr">
               <a:buNone/>
             </a:pPr>
             <a:r>
@@ -3441,7 +3260,7 @@
           <a:bodyPr wrap="square" rtlCol="0" anchor="ctr"/>
           <a:lstStyle/>
           <a:p>
-            <a:pPr algn="ctr" indent="0" marL="0">
+            <a:pPr marL="0" indent="0" algn="ctr">
               <a:lnSpc>
                 <a:spcPts val="1600"/>
               </a:lnSpc>
@@ -3483,7 +3302,7 @@
           <a:bodyPr wrap="square" rtlCol="0" anchor="ctr"/>
           <a:lstStyle/>
           <a:p>
-            <a:pPr algn="ctr" indent="0" marL="0">
+            <a:pPr marL="0" indent="0" algn="ctr">
               <a:buNone/>
             </a:pPr>
             <a:r>
@@ -3564,7 +3383,7 @@
           <a:bodyPr wrap="square" rtlCol="0" anchor="ctr"/>
           <a:lstStyle/>
           <a:p>
-            <a:pPr algn="ctr" indent="0" marL="0">
+            <a:pPr marL="0" indent="0" algn="ctr">
               <a:buNone/>
             </a:pPr>
             <a:r>
@@ -3603,7 +3422,7 @@
           <a:bodyPr wrap="square" rtlCol="0" anchor="ctr"/>
           <a:lstStyle/>
           <a:p>
-            <a:pPr algn="ctr" indent="0" marL="0">
+            <a:pPr marL="0" indent="0" algn="ctr">
               <a:buNone/>
             </a:pPr>
             <a:r>
@@ -3642,7 +3461,7 @@
           <a:bodyPr wrap="square" rtlCol="0" anchor="ctr"/>
           <a:lstStyle/>
           <a:p>
-            <a:pPr algn="ctr" indent="0" marL="0">
+            <a:pPr marL="0" indent="0" algn="ctr">
               <a:lnSpc>
                 <a:spcPts val="1600"/>
               </a:lnSpc>
@@ -3679,6 +3498,7 @@
         <a:solidFill>
           <a:srgbClr val="03050C"/>
         </a:solidFill>
+        <a:effectLst/>
       </p:bgPr>
     </p:bg>
     <p:spTree>
@@ -3716,7 +3536,7 @@
           <a:bodyPr wrap="square" rtlCol="0" anchor="ctr"/>
           <a:lstStyle/>
           <a:p>
-            <a:pPr indent="0" marL="0">
+            <a:pPr marL="0" indent="0">
               <a:buNone/>
             </a:pPr>
             <a:r>
@@ -3800,7 +3620,7 @@
           <a:bodyPr wrap="square" rtlCol="0" anchor="ctr"/>
           <a:lstStyle/>
           <a:p>
-            <a:pPr indent="0" marL="0">
+            <a:pPr marL="0" indent="0">
               <a:buNone/>
             </a:pPr>
             <a:r>
@@ -3839,7 +3659,7 @@
           <a:bodyPr wrap="square" rtlCol="0" anchor="ctr"/>
           <a:lstStyle/>
           <a:p>
-            <a:pPr indent="0" marL="0">
+            <a:pPr marL="0" indent="0">
               <a:lnSpc>
                 <a:spcPts val="1800"/>
               </a:lnSpc>
@@ -3859,7 +3679,7 @@
             <a:endParaRPr lang="en-US" sz="1200" dirty="0"/>
           </a:p>
           <a:p>
-            <a:pPr indent="0" marL="0">
+            <a:pPr marL="0" indent="0">
               <a:lnSpc>
                 <a:spcPts val="1800"/>
               </a:lnSpc>
@@ -3879,7 +3699,7 @@
             <a:endParaRPr lang="en-US" sz="1200" dirty="0"/>
           </a:p>
           <a:p>
-            <a:pPr indent="0" marL="0">
+            <a:pPr marL="0" indent="0">
               <a:lnSpc>
                 <a:spcPts val="1800"/>
               </a:lnSpc>
@@ -3946,7 +3766,7 @@
           <a:bodyPr wrap="square" rtlCol="0" anchor="ctr"/>
           <a:lstStyle/>
           <a:p>
-            <a:pPr indent="0" marL="0">
+            <a:pPr marL="0" indent="0">
               <a:buNone/>
             </a:pPr>
             <a:r>
@@ -3985,7 +3805,7 @@
           <a:bodyPr wrap="square" rtlCol="0" anchor="ctr"/>
           <a:lstStyle/>
           <a:p>
-            <a:pPr indent="0" marL="0">
+            <a:pPr marL="0" indent="0">
               <a:lnSpc>
                 <a:spcPts val="1800"/>
               </a:lnSpc>
@@ -4005,7 +3825,7 @@
             <a:endParaRPr lang="en-US" sz="1200" dirty="0"/>
           </a:p>
           <a:p>
-            <a:pPr indent="0" marL="0">
+            <a:pPr marL="0" indent="0">
               <a:lnSpc>
                 <a:spcPts val="1800"/>
               </a:lnSpc>
@@ -4025,7 +3845,7 @@
             <a:endParaRPr lang="en-US" sz="1200" dirty="0"/>
           </a:p>
           <a:p>
-            <a:pPr indent="0" marL="0">
+            <a:pPr marL="0" indent="0">
               <a:lnSpc>
                 <a:spcPts val="1800"/>
               </a:lnSpc>
@@ -4092,7 +3912,7 @@
           <a:bodyPr wrap="square" rtlCol="0" anchor="ctr"/>
           <a:lstStyle/>
           <a:p>
-            <a:pPr indent="0" marL="0">
+            <a:pPr marL="0" indent="0">
               <a:buNone/>
             </a:pPr>
             <a:r>
@@ -4131,7 +3951,7 @@
           <a:bodyPr wrap="square" rtlCol="0" anchor="ctr"/>
           <a:lstStyle/>
           <a:p>
-            <a:pPr indent="0" marL="0">
+            <a:pPr marL="0" indent="0">
               <a:lnSpc>
                 <a:spcPts val="1800"/>
               </a:lnSpc>
@@ -4151,7 +3971,7 @@
             <a:endParaRPr lang="en-US" sz="1200" dirty="0"/>
           </a:p>
           <a:p>
-            <a:pPr indent="0" marL="0">
+            <a:pPr marL="0" indent="0">
               <a:lnSpc>
                 <a:spcPts val="1800"/>
               </a:lnSpc>
@@ -4171,7 +3991,7 @@
             <a:endParaRPr lang="en-US" sz="1200" dirty="0"/>
           </a:p>
           <a:p>
-            <a:pPr indent="0" marL="0">
+            <a:pPr marL="0" indent="0">
               <a:lnSpc>
                 <a:spcPts val="1800"/>
               </a:lnSpc>
@@ -4238,7 +4058,7 @@
           <a:bodyPr wrap="square" rtlCol="0" anchor="ctr"/>
           <a:lstStyle/>
           <a:p>
-            <a:pPr indent="0" marL="0">
+            <a:pPr marL="0" indent="0">
               <a:buNone/>
             </a:pPr>
             <a:r>
@@ -4277,7 +4097,7 @@
           <a:bodyPr wrap="square" rtlCol="0" anchor="ctr"/>
           <a:lstStyle/>
           <a:p>
-            <a:pPr indent="0" marL="0">
+            <a:pPr marL="0" indent="0">
               <a:lnSpc>
                 <a:spcPts val="1800"/>
               </a:lnSpc>
@@ -4297,7 +4117,7 @@
             <a:endParaRPr lang="en-US" sz="1200" dirty="0"/>
           </a:p>
           <a:p>
-            <a:pPr indent="0" marL="0">
+            <a:pPr marL="0" indent="0">
               <a:lnSpc>
                 <a:spcPts val="1800"/>
               </a:lnSpc>
@@ -4317,7 +4137,7 @@
             <a:endParaRPr lang="en-US" sz="1200" dirty="0"/>
           </a:p>
           <a:p>
-            <a:pPr indent="0" marL="0">
+            <a:pPr marL="0" indent="0">
               <a:lnSpc>
                 <a:spcPts val="1800"/>
               </a:lnSpc>
@@ -4384,7 +4204,7 @@
           <a:bodyPr wrap="square" rtlCol="0" anchor="ctr"/>
           <a:lstStyle/>
           <a:p>
-            <a:pPr indent="0" marL="0">
+            <a:pPr marL="0" indent="0">
               <a:buNone/>
             </a:pPr>
             <a:r>
@@ -4423,7 +4243,7 @@
           <a:bodyPr wrap="square" rtlCol="0" anchor="ctr"/>
           <a:lstStyle/>
           <a:p>
-            <a:pPr indent="0" marL="0">
+            <a:pPr marL="0" indent="0">
               <a:lnSpc>
                 <a:spcPts val="1800"/>
               </a:lnSpc>
@@ -4443,7 +4263,7 @@
             <a:endParaRPr lang="en-US" sz="1200" dirty="0"/>
           </a:p>
           <a:p>
-            <a:pPr indent="0" marL="0">
+            <a:pPr marL="0" indent="0">
               <a:lnSpc>
                 <a:spcPts val="1800"/>
               </a:lnSpc>
@@ -4463,7 +4283,7 @@
             <a:endParaRPr lang="en-US" sz="1200" dirty="0"/>
           </a:p>
           <a:p>
-            <a:pPr indent="0" marL="0">
+            <a:pPr marL="0" indent="0">
               <a:lnSpc>
                 <a:spcPts val="1800"/>
               </a:lnSpc>
@@ -4530,7 +4350,7 @@
           <a:bodyPr wrap="square" rtlCol="0" anchor="ctr"/>
           <a:lstStyle/>
           <a:p>
-            <a:pPr indent="0" marL="0">
+            <a:pPr marL="0" indent="0">
               <a:buNone/>
             </a:pPr>
             <a:r>
@@ -4569,7 +4389,7 @@
           <a:bodyPr wrap="square" rtlCol="0" anchor="ctr"/>
           <a:lstStyle/>
           <a:p>
-            <a:pPr indent="0" marL="0">
+            <a:pPr marL="0" indent="0">
               <a:lnSpc>
                 <a:spcPts val="1800"/>
               </a:lnSpc>
@@ -4589,7 +4409,7 @@
             <a:endParaRPr lang="en-US" sz="1200" dirty="0"/>
           </a:p>
           <a:p>
-            <a:pPr indent="0" marL="0">
+            <a:pPr marL="0" indent="0">
               <a:lnSpc>
                 <a:spcPts val="1800"/>
               </a:lnSpc>
@@ -4609,7 +4429,7 @@
             <a:endParaRPr lang="en-US" sz="1200" dirty="0"/>
           </a:p>
           <a:p>
-            <a:pPr indent="0" marL="0">
+            <a:pPr marL="0" indent="0">
               <a:lnSpc>
                 <a:spcPts val="1800"/>
               </a:lnSpc>
@@ -4646,6 +4466,7 @@
         <a:solidFill>
           <a:srgbClr val="03050C"/>
         </a:solidFill>
+        <a:effectLst/>
       </p:bgPr>
     </p:bg>
     <p:spTree>
@@ -4683,7 +4504,7 @@
           <a:bodyPr wrap="square" rtlCol="0" anchor="ctr"/>
           <a:lstStyle/>
           <a:p>
-            <a:pPr indent="0" marL="0">
+            <a:pPr marL="0" indent="0">
               <a:buNone/>
             </a:pPr>
             <a:r>
@@ -4767,7 +4588,7 @@
           <a:bodyPr wrap="square" rtlCol="0" anchor="ctr"/>
           <a:lstStyle/>
           <a:p>
-            <a:pPr indent="0" marL="0">
+            <a:pPr marL="0" indent="0">
               <a:buNone/>
             </a:pPr>
             <a:r>
@@ -4806,7 +4627,7 @@
           <a:bodyPr wrap="square" rtlCol="0" anchor="ctr"/>
           <a:lstStyle/>
           <a:p>
-            <a:pPr indent="0" marL="0">
+            <a:pPr marL="0" indent="0">
               <a:lnSpc>
                 <a:spcPts val="1800"/>
               </a:lnSpc>
@@ -4826,7 +4647,7 @@
             <a:endParaRPr lang="en-US" sz="1200" dirty="0"/>
           </a:p>
           <a:p>
-            <a:pPr indent="0" marL="0">
+            <a:pPr marL="0" indent="0">
               <a:lnSpc>
                 <a:spcPts val="1800"/>
               </a:lnSpc>
@@ -4835,7 +4656,7 @@
             <a:endParaRPr lang="en-US" sz="1200" dirty="0"/>
           </a:p>
           <a:p>
-            <a:pPr indent="0" marL="0">
+            <a:pPr marL="0" indent="0">
               <a:lnSpc>
                 <a:spcPts val="1800"/>
               </a:lnSpc>
@@ -4855,7 +4676,7 @@
             <a:endParaRPr lang="en-US" sz="1200" dirty="0"/>
           </a:p>
           <a:p>
-            <a:pPr indent="0" marL="0">
+            <a:pPr marL="0" indent="0">
               <a:lnSpc>
                 <a:spcPts val="1800"/>
               </a:lnSpc>
@@ -4864,7 +4685,7 @@
             <a:endParaRPr lang="en-US" sz="1200" dirty="0"/>
           </a:p>
           <a:p>
-            <a:pPr indent="0" marL="0">
+            <a:pPr marL="0" indent="0">
               <a:lnSpc>
                 <a:spcPts val="1800"/>
               </a:lnSpc>
@@ -4884,7 +4705,7 @@
             <a:endParaRPr lang="en-US" sz="1200" dirty="0"/>
           </a:p>
           <a:p>
-            <a:pPr indent="0" marL="0">
+            <a:pPr marL="0" indent="0">
               <a:lnSpc>
                 <a:spcPts val="1800"/>
               </a:lnSpc>
@@ -4893,7 +4714,7 @@
             <a:endParaRPr lang="en-US" sz="1200" dirty="0"/>
           </a:p>
           <a:p>
-            <a:pPr indent="0" marL="0">
+            <a:pPr marL="0" indent="0">
               <a:lnSpc>
                 <a:spcPts val="1800"/>
               </a:lnSpc>
@@ -4960,7 +4781,7 @@
           <a:bodyPr wrap="square" rtlCol="0" anchor="ctr"/>
           <a:lstStyle/>
           <a:p>
-            <a:pPr indent="0" marL="0">
+            <a:pPr marL="0" indent="0">
               <a:buNone/>
             </a:pPr>
             <a:r>
@@ -4999,7 +4820,7 @@
           <a:bodyPr wrap="square" rtlCol="0" anchor="ctr"/>
           <a:lstStyle/>
           <a:p>
-            <a:pPr indent="0" marL="0">
+            <a:pPr marL="0" indent="0">
               <a:buNone/>
             </a:pPr>
             <a:r>
@@ -5038,7 +4859,7 @@
           <a:bodyPr wrap="square" rtlCol="0" anchor="ctr"/>
           <a:lstStyle/>
           <a:p>
-            <a:pPr indent="0" marL="0">
+            <a:pPr marL="0" indent="0">
               <a:lnSpc>
                 <a:spcPts val="1800"/>
               </a:lnSpc>
@@ -5058,7 +4879,7 @@
             <a:endParaRPr lang="en-US" sz="1200" dirty="0"/>
           </a:p>
           <a:p>
-            <a:pPr indent="0" marL="0">
+            <a:pPr marL="0" indent="0">
               <a:lnSpc>
                 <a:spcPts val="1800"/>
               </a:lnSpc>
@@ -5067,7 +4888,7 @@
             <a:endParaRPr lang="en-US" sz="1200" dirty="0"/>
           </a:p>
           <a:p>
-            <a:pPr indent="0" marL="0">
+            <a:pPr marL="0" indent="0">
               <a:lnSpc>
                 <a:spcPts val="1800"/>
               </a:lnSpc>
@@ -5087,7 +4908,7 @@
             <a:endParaRPr lang="en-US" sz="1200" dirty="0"/>
           </a:p>
           <a:p>
-            <a:pPr indent="0" marL="0">
+            <a:pPr marL="0" indent="0">
               <a:lnSpc>
                 <a:spcPts val="1800"/>
               </a:lnSpc>
@@ -5096,7 +4917,7 @@
             <a:endParaRPr lang="en-US" sz="1200" dirty="0"/>
           </a:p>
           <a:p>
-            <a:pPr indent="0" marL="0">
+            <a:pPr marL="0" indent="0">
               <a:lnSpc>
                 <a:spcPts val="1800"/>
               </a:lnSpc>
@@ -5116,7 +4937,7 @@
             <a:endParaRPr lang="en-US" sz="1200" dirty="0"/>
           </a:p>
           <a:p>
-            <a:pPr indent="0" marL="0">
+            <a:pPr marL="0" indent="0">
               <a:lnSpc>
                 <a:spcPts val="1800"/>
               </a:lnSpc>
@@ -5125,7 +4946,7 @@
             <a:endParaRPr lang="en-US" sz="1200" dirty="0"/>
           </a:p>
           <a:p>
-            <a:pPr indent="0" marL="0">
+            <a:pPr marL="0" indent="0">
               <a:lnSpc>
                 <a:spcPts val="1800"/>
               </a:lnSpc>
@@ -5162,6 +4983,7 @@
         <a:solidFill>
           <a:srgbClr val="03050C"/>
         </a:solidFill>
+        <a:effectLst/>
       </p:bgPr>
     </p:bg>
     <p:spTree>
@@ -5199,7 +5021,7 @@
           <a:bodyPr wrap="square" rtlCol="0" anchor="ctr"/>
           <a:lstStyle/>
           <a:p>
-            <a:pPr indent="0" marL="0">
+            <a:pPr marL="0" indent="0">
               <a:buNone/>
             </a:pPr>
             <a:r>
@@ -5246,26 +5068,62 @@
           <p:nvPr>
             <p:extLst>
               <p:ext uri="{D42A27DB-BD31-4B8C-83A1-F6EECF244321}">
-                <p14:modId xmlns:p14="http://schemas.microsoft.com/office/powerpoint/2010/main" val="1579011935"/>
+                <p14:modId xmlns:p14="http://schemas.microsoft.com/office/powerpoint/2010/main" val="2765259306"/>
               </p:ext>
             </p:extLst>
           </p:nvPr>
         </p:nvGraphicFramePr>
         <p:xfrm>
-          <a:off x="457200" y="1463040"/>
-          <a:ext cx="11274552" cy="3840480"/>
+          <a:off x="457200" y="1780266"/>
+          <a:ext cx="11274552" cy="3072384"/>
         </p:xfrm>
         <a:graphic>
           <a:graphicData uri="http://schemas.openxmlformats.org/drawingml/2006/table">
             <a:tbl>
               <a:tblPr/>
               <a:tblGrid>
-                <a:gridCol w="731520"/>
-                <a:gridCol w="1097280"/>
-                <a:gridCol w="2926080"/>
-                <a:gridCol w="1371600"/>
-                <a:gridCol w="1097280"/>
-                <a:gridCol w="4050792"/>
+                <a:gridCol w="731520">
+                  <a:extLst>
+                    <a:ext uri="{9D8B030D-6E8A-4147-A177-3AD203B41FA5}">
+                      <a16:colId xmlns:a16="http://schemas.microsoft.com/office/drawing/2014/main" val="20000"/>
+                    </a:ext>
+                  </a:extLst>
+                </a:gridCol>
+                <a:gridCol w="1097280">
+                  <a:extLst>
+                    <a:ext uri="{9D8B030D-6E8A-4147-A177-3AD203B41FA5}">
+                      <a16:colId xmlns:a16="http://schemas.microsoft.com/office/drawing/2014/main" val="20001"/>
+                    </a:ext>
+                  </a:extLst>
+                </a:gridCol>
+                <a:gridCol w="2926080">
+                  <a:extLst>
+                    <a:ext uri="{9D8B030D-6E8A-4147-A177-3AD203B41FA5}">
+                      <a16:colId xmlns:a16="http://schemas.microsoft.com/office/drawing/2014/main" val="20002"/>
+                    </a:ext>
+                  </a:extLst>
+                </a:gridCol>
+                <a:gridCol w="1371600">
+                  <a:extLst>
+                    <a:ext uri="{9D8B030D-6E8A-4147-A177-3AD203B41FA5}">
+                      <a16:colId xmlns:a16="http://schemas.microsoft.com/office/drawing/2014/main" val="20003"/>
+                    </a:ext>
+                  </a:extLst>
+                </a:gridCol>
+                <a:gridCol w="1097280">
+                  <a:extLst>
+                    <a:ext uri="{9D8B030D-6E8A-4147-A177-3AD203B41FA5}">
+                      <a16:colId xmlns:a16="http://schemas.microsoft.com/office/drawing/2014/main" val="20004"/>
+                    </a:ext>
+                  </a:extLst>
+                </a:gridCol>
+                <a:gridCol w="4050792">
+                  <a:extLst>
+                    <a:ext uri="{9D8B030D-6E8A-4147-A177-3AD203B41FA5}">
+                      <a16:colId xmlns:a16="http://schemas.microsoft.com/office/drawing/2014/main" val="20005"/>
+                    </a:ext>
+                  </a:extLst>
+                </a:gridCol>
               </a:tblGrid>
               <a:tr h="768096">
                 <a:tc>
@@ -5273,7 +5131,7 @@
                     <a:bodyPr/>
                     <a:lstStyle/>
                     <a:p>
-                      <a:pPr algn="ctr" indent="0" marL="0">
+                      <a:pPr marL="0" indent="0" algn="ctr">
                         <a:buNone/>
                       </a:pPr>
                       <a:r>
@@ -5294,7 +5152,7 @@
                       </a:endParaRPr>
                     </a:p>
                   </a:txBody>
-                  <a:tcPr marL="91440" marR="91440" marT="45720" marB="45720" anchor="ctr">
+                  <a:tcPr anchor="ctr">
                     <a:lnL w="12700" cap="flat" cmpd="sng" algn="ctr">
                       <a:solidFill>
                         <a:srgbClr val="252B44"/>
@@ -5341,7 +5199,7 @@
                     <a:bodyPr/>
                     <a:lstStyle/>
                     <a:p>
-                      <a:pPr algn="ctr" indent="0" marL="0">
+                      <a:pPr marL="0" indent="0" algn="ctr">
                         <a:buNone/>
                       </a:pPr>
                       <a:r>
@@ -5362,7 +5220,7 @@
                       </a:endParaRPr>
                     </a:p>
                   </a:txBody>
-                  <a:tcPr marL="91440" marR="91440" marT="45720" marB="45720" anchor="ctr">
+                  <a:tcPr anchor="ctr">
                     <a:lnL w="12700" cap="flat" cmpd="sng" algn="ctr">
                       <a:solidFill>
                         <a:srgbClr val="252B44"/>
@@ -5409,7 +5267,7 @@
                     <a:bodyPr/>
                     <a:lstStyle/>
                     <a:p>
-                      <a:pPr algn="ctr" indent="0" marL="0">
+                      <a:pPr marL="0" indent="0" algn="ctr">
                         <a:buNone/>
                       </a:pPr>
                       <a:r>
@@ -5430,7 +5288,7 @@
                       </a:endParaRPr>
                     </a:p>
                   </a:txBody>
-                  <a:tcPr marL="91440" marR="91440" marT="45720" marB="45720" anchor="ctr">
+                  <a:tcPr anchor="ctr">
                     <a:lnL w="12700" cap="flat" cmpd="sng" algn="ctr">
                       <a:solidFill>
                         <a:srgbClr val="252B44"/>
@@ -5477,7 +5335,7 @@
                     <a:bodyPr/>
                     <a:lstStyle/>
                     <a:p>
-                      <a:pPr algn="ctr" indent="0" marL="0">
+                      <a:pPr marL="0" indent="0" algn="ctr">
                         <a:buNone/>
                       </a:pPr>
                       <a:r>
@@ -5498,7 +5356,7 @@
                       </a:endParaRPr>
                     </a:p>
                   </a:txBody>
-                  <a:tcPr marL="91440" marR="91440" marT="45720" marB="45720" anchor="ctr">
+                  <a:tcPr anchor="ctr">
                     <a:lnL w="12700" cap="flat" cmpd="sng" algn="ctr">
                       <a:solidFill>
                         <a:srgbClr val="252B44"/>
@@ -5545,7 +5403,7 @@
                     <a:bodyPr/>
                     <a:lstStyle/>
                     <a:p>
-                      <a:pPr algn="ctr" indent="0" marL="0">
+                      <a:pPr marL="0" indent="0" algn="ctr">
                         <a:buNone/>
                       </a:pPr>
                       <a:r>
@@ -5566,7 +5424,7 @@
                       </a:endParaRPr>
                     </a:p>
                   </a:txBody>
-                  <a:tcPr marL="91440" marR="91440" marT="45720" marB="45720" anchor="ctr">
+                  <a:tcPr anchor="ctr">
                     <a:lnL w="12700" cap="flat" cmpd="sng" algn="ctr">
                       <a:solidFill>
                         <a:srgbClr val="252B44"/>
@@ -5613,7 +5471,7 @@
                     <a:bodyPr/>
                     <a:lstStyle/>
                     <a:p>
-                      <a:pPr algn="ctr" indent="0" marL="0">
+                      <a:pPr marL="0" indent="0" algn="ctr">
                         <a:buNone/>
                       </a:pPr>
                       <a:r>
@@ -5634,7 +5492,7 @@
                       </a:endParaRPr>
                     </a:p>
                   </a:txBody>
-                  <a:tcPr marL="91440" marR="91440" marT="45720" marB="45720" anchor="ctr">
+                  <a:tcPr anchor="ctr">
                     <a:lnL w="12700" cap="flat" cmpd="sng" algn="ctr">
                       <a:solidFill>
                         <a:srgbClr val="252B44"/>
@@ -5676,6 +5534,11 @@
                     </a:solidFill>
                   </a:tcPr>
                 </a:tc>
+                <a:extLst>
+                  <a:ext uri="{0D108BD9-81ED-4DB2-BD59-A6C34878D82A}">
+                    <a16:rowId xmlns:a16="http://schemas.microsoft.com/office/drawing/2014/main" val="10000"/>
+                  </a:ext>
+                </a:extLst>
               </a:tr>
               <a:tr h="768096">
                 <a:tc>
@@ -5683,7 +5546,7 @@
                     <a:bodyPr/>
                     <a:lstStyle/>
                     <a:p>
-                      <a:pPr algn="ctr" indent="0" marL="0">
+                      <a:pPr marL="0" indent="0" algn="ctr">
                         <a:buNone/>
                       </a:pPr>
                       <a:r>
@@ -5704,7 +5567,7 @@
                       </a:endParaRPr>
                     </a:p>
                   </a:txBody>
-                  <a:tcPr marL="91440" marR="91440" marT="45720" marB="45720" anchor="ctr">
+                  <a:tcPr anchor="ctr">
                     <a:lnL w="12700" cap="flat" cmpd="sng" algn="ctr">
                       <a:solidFill>
                         <a:srgbClr val="252B44"/>
@@ -5751,11 +5614,11 @@
                     <a:bodyPr/>
                     <a:lstStyle/>
                     <a:p>
-                      <a:pPr algn="ctr" indent="0" marL="0">
+                      <a:pPr marL="0" indent="0" algn="ctr">
                         <a:buNone/>
                       </a:pPr>
                       <a:r>
-                        <a:rPr lang="en-US" sz="1200" dirty="0">
+                        <a:rPr lang="en-US" sz="1200" dirty="0" smtClean="0">
                           <a:solidFill>
                             <a:srgbClr val="FFFFFF"/>
                           </a:solidFill>
@@ -5763,7 +5626,7 @@
                           <a:ea typeface="Arial" pitchFamily="34" charset="-122"/>
                           <a:cs typeface="Arial" pitchFamily="34" charset="-120"/>
                         </a:rPr>
-                        <a:t>40</a:t>
+                        <a:t>31</a:t>
                       </a:r>
                       <a:endParaRPr lang="en-US" sz="1200" dirty="0">
                         <a:latin typeface="Arial" charset="0"/>
@@ -5772,7 +5635,7 @@
                       </a:endParaRPr>
                     </a:p>
                   </a:txBody>
-                  <a:tcPr marL="91440" marR="91440" marT="45720" marB="45720" anchor="ctr">
+                  <a:tcPr anchor="ctr">
                     <a:lnL w="12700" cap="flat" cmpd="sng" algn="ctr">
                       <a:solidFill>
                         <a:srgbClr val="252B44"/>
@@ -5819,9 +5682,84 @@
                     <a:bodyPr/>
                     <a:lstStyle/>
                     <a:p>
-                      <a:pPr algn="ctr" indent="0" marL="0">
+                      <a:pPr marL="0" marR="0" indent="0" algn="ctr" defTabSz="914400" rtl="0" eaLnBrk="1" fontAlgn="auto" latinLnBrk="0" hangingPunct="1">
+                        <a:lnSpc>
+                          <a:spcPct val="100000"/>
+                        </a:lnSpc>
+                        <a:spcBef>
+                          <a:spcPts val="0"/>
+                        </a:spcBef>
+                        <a:spcAft>
+                          <a:spcPts val="0"/>
+                        </a:spcAft>
+                        <a:buClrTx/>
+                        <a:buSzTx/>
+                        <a:buFontTx/>
+                        <a:buNone/>
+                        <a:tabLst/>
+                        <a:defRPr/>
+                      </a:pPr>
+                      <a:r>
+                        <a:rPr lang="en-US" sz="1200" b="1" dirty="0" smtClean="0">
+                          <a:solidFill>
+                            <a:srgbClr val="FFFFFF"/>
+                          </a:solidFill>
+                          <a:latin typeface="Arial" pitchFamily="34" charset="0"/>
+                          <a:ea typeface="Arial" pitchFamily="34" charset="-122"/>
+                          <a:cs typeface="Arial" pitchFamily="34" charset="-120"/>
+                        </a:rPr>
+                        <a:t>Pilla Raja </a:t>
+                      </a:r>
+                      <a:r>
+                        <a:rPr lang="en-US" sz="1200" b="1" dirty="0" err="1" smtClean="0">
+                          <a:solidFill>
+                            <a:srgbClr val="FFFFFF"/>
+                          </a:solidFill>
+                          <a:latin typeface="Arial" pitchFamily="34" charset="0"/>
+                          <a:ea typeface="Arial" pitchFamily="34" charset="-122"/>
+                          <a:cs typeface="Arial" pitchFamily="34" charset="-120"/>
+                        </a:rPr>
+                        <a:t>Srirama</a:t>
+                      </a:r>
+                      <a:r>
+                        <a:rPr lang="en-US" sz="1200" b="1" dirty="0" smtClean="0">
+                          <a:solidFill>
+                            <a:srgbClr val="FFFFFF"/>
+                          </a:solidFill>
+                          <a:latin typeface="Arial" pitchFamily="34" charset="0"/>
+                          <a:ea typeface="Arial" pitchFamily="34" charset="-122"/>
+                          <a:cs typeface="Arial" pitchFamily="34" charset="-120"/>
+                        </a:rPr>
+                        <a:t> </a:t>
+                      </a:r>
+                      <a:r>
+                        <a:rPr lang="en-US" sz="1200" b="1" dirty="0" err="1" smtClean="0">
+                          <a:solidFill>
+                            <a:srgbClr val="FFFFFF"/>
+                          </a:solidFill>
+                          <a:latin typeface="Arial" pitchFamily="34" charset="0"/>
+                          <a:ea typeface="Arial" pitchFamily="34" charset="-122"/>
+                          <a:cs typeface="Arial" pitchFamily="34" charset="-120"/>
+                        </a:rPr>
+                        <a:t>Rameshu</a:t>
+                      </a:r>
+                      <a:endParaRPr lang="en-US" sz="1200" dirty="0" smtClean="0"/>
+                    </a:p>
+                    <a:p>
+                      <a:pPr marL="0" indent="0" algn="ctr">
                         <a:buNone/>
                       </a:pPr>
+                      <a:r>
+                        <a:rPr lang="en-US" sz="1200" dirty="0" smtClean="0">
+                          <a:solidFill>
+                            <a:srgbClr val="FFFFFF"/>
+                          </a:solidFill>
+                          <a:latin typeface="Arial" pitchFamily="34" charset="0"/>
+                          <a:ea typeface="Arial" pitchFamily="34" charset="-122"/>
+                          <a:cs typeface="Arial" pitchFamily="34" charset="-120"/>
+                        </a:rPr>
+                        <a:t>(</a:t>
+                      </a:r>
                       <a:r>
                         <a:rPr lang="en-US" sz="1200" dirty="0">
                           <a:solidFill>
@@ -5831,7 +5769,7 @@
                           <a:ea typeface="Arial" pitchFamily="34" charset="-122"/>
                           <a:cs typeface="Arial" pitchFamily="34" charset="-120"/>
                         </a:rPr>
-                        <a:t>Suwrat Korgaonkar (Leader)</a:t>
+                        <a:t>Leader)</a:t>
                       </a:r>
                       <a:endParaRPr lang="en-US" sz="1200" dirty="0">
                         <a:latin typeface="Arial" charset="0"/>
@@ -5840,7 +5778,7 @@
                       </a:endParaRPr>
                     </a:p>
                   </a:txBody>
-                  <a:tcPr marL="91440" marR="91440" marT="45720" marB="45720" anchor="ctr">
+                  <a:tcPr anchor="ctr">
                     <a:lnL w="12700" cap="flat" cmpd="sng" algn="ctr">
                       <a:solidFill>
                         <a:srgbClr val="252B44"/>
@@ -5887,7 +5825,7 @@
                     <a:bodyPr/>
                     <a:lstStyle/>
                     <a:p>
-                      <a:pPr algn="ctr" indent="0" marL="0">
+                      <a:pPr marL="0" indent="0" algn="ctr">
                         <a:buNone/>
                       </a:pPr>
                       <a:r>
@@ -5908,7 +5846,7 @@
                       </a:endParaRPr>
                     </a:p>
                   </a:txBody>
-                  <a:tcPr marL="91440" marR="91440" marT="45720" marB="45720" anchor="ctr">
+                  <a:tcPr anchor="ctr">
                     <a:lnL w="12700" cap="flat" cmpd="sng" algn="ctr">
                       <a:solidFill>
                         <a:srgbClr val="252B44"/>
@@ -5955,7 +5893,7 @@
                     <a:bodyPr/>
                     <a:lstStyle/>
                     <a:p>
-                      <a:pPr algn="ctr" indent="0" marL="0">
+                      <a:pPr marL="0" indent="0" algn="ctr">
                         <a:buNone/>
                       </a:pPr>
                       <a:r>
@@ -5976,7 +5914,7 @@
                       </a:endParaRPr>
                     </a:p>
                   </a:txBody>
-                  <a:tcPr marL="91440" marR="91440" marT="45720" marB="45720" anchor="ctr">
+                  <a:tcPr anchor="ctr">
                     <a:lnL w="12700" cap="flat" cmpd="sng" algn="ctr">
                       <a:solidFill>
                         <a:srgbClr val="252B44"/>
@@ -6023,9 +5961,20 @@
                     <a:bodyPr/>
                     <a:lstStyle/>
                     <a:p>
-                      <a:pPr algn="ctr" indent="0" marL="0">
+                      <a:pPr marL="0" indent="0" algn="ctr">
                         <a:buNone/>
                       </a:pPr>
+                      <a:r>
+                        <a:rPr lang="en-US" sz="1200" dirty="0" smtClean="0">
+                          <a:solidFill>
+                            <a:srgbClr val="FFFFFF"/>
+                          </a:solidFill>
+                          <a:latin typeface="Arial" pitchFamily="34" charset="0"/>
+                          <a:ea typeface="Arial" pitchFamily="34" charset="-122"/>
+                          <a:cs typeface="Arial" pitchFamily="34" charset="-120"/>
+                        </a:rPr>
+                        <a:t>Sriraghavarama@gmail.com </a:t>
+                      </a:r>
                       <a:r>
                         <a:rPr lang="en-US" sz="1200" dirty="0">
                           <a:solidFill>
@@ -6035,7 +5984,18 @@
                           <a:ea typeface="Arial" pitchFamily="34" charset="-122"/>
                           <a:cs typeface="Arial" pitchFamily="34" charset="-120"/>
                         </a:rPr>
-                        <a:t>suwratkorg@gmail.com / 904263@nm.balbharati.org</a:t>
+                        <a:t>/ </a:t>
+                      </a:r>
+                      <a:r>
+                        <a:rPr lang="en-US" sz="1200" dirty="0" smtClean="0">
+                          <a:solidFill>
+                            <a:srgbClr val="FFFFFF"/>
+                          </a:solidFill>
+                          <a:latin typeface="Arial" pitchFamily="34" charset="0"/>
+                          <a:ea typeface="Arial" pitchFamily="34" charset="-122"/>
+                          <a:cs typeface="Arial" pitchFamily="34" charset="-120"/>
+                        </a:rPr>
+                        <a:t>908200@nm.balbharati.org</a:t>
                       </a:r>
                       <a:endParaRPr lang="en-US" sz="1200" dirty="0">
                         <a:latin typeface="Arial" charset="0"/>
@@ -6044,7 +6004,7 @@
                       </a:endParaRPr>
                     </a:p>
                   </a:txBody>
-                  <a:tcPr marL="91440" marR="91440" marT="45720" marB="45720" anchor="ctr">
+                  <a:tcPr anchor="ctr">
                     <a:lnL w="12700" cap="flat" cmpd="sng" algn="ctr">
                       <a:solidFill>
                         <a:srgbClr val="252B44"/>
@@ -6086,6 +6046,11 @@
                     </a:solidFill>
                   </a:tcPr>
                 </a:tc>
+                <a:extLst>
+                  <a:ext uri="{0D108BD9-81ED-4DB2-BD59-A6C34878D82A}">
+                    <a16:rowId xmlns:a16="http://schemas.microsoft.com/office/drawing/2014/main" val="10001"/>
+                  </a:ext>
+                </a:extLst>
               </a:tr>
               <a:tr h="768096">
                 <a:tc>
@@ -6093,7 +6058,7 @@
                     <a:bodyPr/>
                     <a:lstStyle/>
                     <a:p>
-                      <a:pPr algn="ctr" indent="0" marL="0">
+                      <a:pPr marL="0" indent="0" algn="ctr">
                         <a:buNone/>
                       </a:pPr>
                       <a:r>
@@ -6114,7 +6079,7 @@
                       </a:endParaRPr>
                     </a:p>
                   </a:txBody>
-                  <a:tcPr marL="91440" marR="91440" marT="45720" marB="45720" anchor="ctr">
+                  <a:tcPr anchor="ctr">
                     <a:lnL w="12700" cap="flat" cmpd="sng" algn="ctr">
                       <a:solidFill>
                         <a:srgbClr val="252B44"/>
@@ -6161,11 +6126,11 @@
                     <a:bodyPr/>
                     <a:lstStyle/>
                     <a:p>
-                      <a:pPr algn="ctr" indent="0" marL="0">
+                      <a:pPr marL="0" indent="0" algn="ctr">
                         <a:buNone/>
                       </a:pPr>
                       <a:r>
-                        <a:rPr lang="en-US" sz="1200" dirty="0">
+                        <a:rPr lang="en-US" sz="1200" dirty="0" smtClean="0">
                           <a:solidFill>
                             <a:srgbClr val="FFFFFF"/>
                           </a:solidFill>
@@ -6173,7 +6138,7 @@
                           <a:ea typeface="Arial" pitchFamily="34" charset="-122"/>
                           <a:cs typeface="Arial" pitchFamily="34" charset="-120"/>
                         </a:rPr>
-                        <a:t>41</a:t>
+                        <a:t>24</a:t>
                       </a:r>
                       <a:endParaRPr lang="en-US" sz="1200" dirty="0">
                         <a:latin typeface="Arial" charset="0"/>
@@ -6182,7 +6147,7 @@
                       </a:endParaRPr>
                     </a:p>
                   </a:txBody>
-                  <a:tcPr marL="91440" marR="91440" marT="45720" marB="45720" anchor="ctr">
+                  <a:tcPr anchor="ctr">
                     <a:lnL w="12700" cap="flat" cmpd="sng" algn="ctr">
                       <a:solidFill>
                         <a:srgbClr val="252B44"/>
@@ -6229,11 +6194,11 @@
                     <a:bodyPr/>
                     <a:lstStyle/>
                     <a:p>
-                      <a:pPr algn="ctr" indent="0" marL="0">
+                      <a:pPr marL="0" indent="0" algn="ctr">
                         <a:buNone/>
                       </a:pPr>
                       <a:r>
-                        <a:rPr lang="en-US" sz="1200" dirty="0">
+                        <a:rPr lang="en-US" sz="1200" dirty="0" err="1" smtClean="0">
                           <a:solidFill>
                             <a:srgbClr val="FFFFFF"/>
                           </a:solidFill>
@@ -6241,7 +6206,29 @@
                           <a:ea typeface="Arial" pitchFamily="34" charset="-122"/>
                           <a:cs typeface="Arial" pitchFamily="34" charset="-120"/>
                         </a:rPr>
-                        <a:t>Suryansh Gupta</a:t>
+                        <a:t>Nirbhay</a:t>
+                      </a:r>
+                      <a:r>
+                        <a:rPr lang="en-US" sz="1200" dirty="0" smtClean="0">
+                          <a:solidFill>
+                            <a:srgbClr val="FFFFFF"/>
+                          </a:solidFill>
+                          <a:latin typeface="Arial" pitchFamily="34" charset="0"/>
+                          <a:ea typeface="Arial" pitchFamily="34" charset="-122"/>
+                          <a:cs typeface="Arial" pitchFamily="34" charset="-120"/>
+                        </a:rPr>
+                        <a:t> </a:t>
+                      </a:r>
+                      <a:r>
+                        <a:rPr lang="en-US" sz="1200" dirty="0" err="1" smtClean="0">
+                          <a:solidFill>
+                            <a:srgbClr val="FFFFFF"/>
+                          </a:solidFill>
+                          <a:latin typeface="Arial" pitchFamily="34" charset="0"/>
+                          <a:ea typeface="Arial" pitchFamily="34" charset="-122"/>
+                          <a:cs typeface="Arial" pitchFamily="34" charset="-120"/>
+                        </a:rPr>
+                        <a:t>Firake</a:t>
                       </a:r>
                       <a:endParaRPr lang="en-US" sz="1200" dirty="0">
                         <a:latin typeface="Arial" charset="0"/>
@@ -6250,7 +6237,7 @@
                       </a:endParaRPr>
                     </a:p>
                   </a:txBody>
-                  <a:tcPr marL="91440" marR="91440" marT="45720" marB="45720" anchor="ctr">
+                  <a:tcPr anchor="ctr">
                     <a:lnL w="12700" cap="flat" cmpd="sng" algn="ctr">
                       <a:solidFill>
                         <a:srgbClr val="252B44"/>
@@ -6297,7 +6284,7 @@
                     <a:bodyPr/>
                     <a:lstStyle/>
                     <a:p>
-                      <a:pPr algn="ctr" indent="0" marL="0">
+                      <a:pPr marL="0" indent="0" algn="ctr">
                         <a:buNone/>
                       </a:pPr>
                       <a:r>
@@ -6318,7 +6305,7 @@
                       </a:endParaRPr>
                     </a:p>
                   </a:txBody>
-                  <a:tcPr marL="91440" marR="91440" marT="45720" marB="45720" anchor="ctr">
+                  <a:tcPr anchor="ctr">
                     <a:lnL w="12700" cap="flat" cmpd="sng" algn="ctr">
                       <a:solidFill>
                         <a:srgbClr val="252B44"/>
@@ -6365,7 +6352,7 @@
                     <a:bodyPr/>
                     <a:lstStyle/>
                     <a:p>
-                      <a:pPr algn="ctr" indent="0" marL="0">
+                      <a:pPr marL="0" indent="0" algn="ctr">
                         <a:buNone/>
                       </a:pPr>
                       <a:r>
@@ -6386,7 +6373,7 @@
                       </a:endParaRPr>
                     </a:p>
                   </a:txBody>
-                  <a:tcPr marL="91440" marR="91440" marT="45720" marB="45720" anchor="ctr">
+                  <a:tcPr anchor="ctr">
                     <a:lnL w="12700" cap="flat" cmpd="sng" algn="ctr">
                       <a:solidFill>
                         <a:srgbClr val="252B44"/>
@@ -6433,11 +6420,38 @@
                     <a:bodyPr/>
                     <a:lstStyle/>
                     <a:p>
-                      <a:pPr algn="ctr" indent="0" marL="0">
+                      <a:pPr marL="0" indent="0" algn="ctr">
                         <a:buNone/>
                       </a:pPr>
                       <a:r>
-                        <a:rPr lang="en-US" sz="1200" dirty="0">
+                        <a:rPr lang="en-US" sz="1200" u="none" dirty="0" err="1" smtClean="0">
+                          <a:solidFill>
+                            <a:schemeClr val="bg1"/>
+                          </a:solidFill>
+                          <a:latin typeface="Arial" pitchFamily="34" charset="0"/>
+                          <a:ea typeface="Arial" pitchFamily="34" charset="-122"/>
+                          <a:cs typeface="Arial" pitchFamily="34" charset="-120"/>
+                        </a:rPr>
+                        <a:t>Nirbhay</a:t>
+                      </a:r>
+                      <a:r>
+                        <a:rPr lang="en-US" sz="1200" u="none" dirty="0" smtClean="0">
+                          <a:solidFill>
+                            <a:schemeClr val="bg1"/>
+                          </a:solidFill>
+                          <a:latin typeface="Arial" pitchFamily="34" charset="0"/>
+                          <a:ea typeface="Arial" pitchFamily="34" charset="-122"/>
+                          <a:cs typeface="Arial" pitchFamily="34" charset="-120"/>
+                        </a:rPr>
+                        <a:t> firake@gmail.com/</a:t>
+                      </a:r>
+                    </a:p>
+                    <a:p>
+                      <a:pPr marL="0" indent="0" algn="ctr">
+                        <a:buNone/>
+                      </a:pPr>
+                      <a:r>
+                        <a:rPr lang="en-US" sz="1200" dirty="0" smtClean="0">
                           <a:solidFill>
                             <a:srgbClr val="FFFFFF"/>
                           </a:solidFill>
@@ -6445,7 +6459,7 @@
                           <a:ea typeface="Arial" pitchFamily="34" charset="-122"/>
                           <a:cs typeface="Arial" pitchFamily="34" charset="-120"/>
                         </a:rPr>
-                        <a:t>907685@nm.balbharati.org</a:t>
+                        <a:t>908311@nm.balbharati.org</a:t>
                       </a:r>
                       <a:endParaRPr lang="en-US" sz="1200" dirty="0">
                         <a:latin typeface="Arial" charset="0"/>
@@ -6454,7 +6468,7 @@
                       </a:endParaRPr>
                     </a:p>
                   </a:txBody>
-                  <a:tcPr marL="91440" marR="91440" marT="45720" marB="45720" anchor="ctr">
+                  <a:tcPr anchor="ctr">
                     <a:lnL w="12700" cap="flat" cmpd="sng" algn="ctr">
                       <a:solidFill>
                         <a:srgbClr val="252B44"/>
@@ -6496,6 +6510,11 @@
                     </a:solidFill>
                   </a:tcPr>
                 </a:tc>
+                <a:extLst>
+                  <a:ext uri="{0D108BD9-81ED-4DB2-BD59-A6C34878D82A}">
+                    <a16:rowId xmlns:a16="http://schemas.microsoft.com/office/drawing/2014/main" val="10002"/>
+                  </a:ext>
+                </a:extLst>
               </a:tr>
               <a:tr h="768096">
                 <a:tc>
@@ -6503,7 +6522,7 @@
                     <a:bodyPr/>
                     <a:lstStyle/>
                     <a:p>
-                      <a:pPr algn="ctr" indent="0" marL="0">
+                      <a:pPr marL="0" indent="0" algn="ctr">
                         <a:buNone/>
                       </a:pPr>
                       <a:r>
@@ -6524,7 +6543,7 @@
                       </a:endParaRPr>
                     </a:p>
                   </a:txBody>
-                  <a:tcPr marL="91440" marR="91440" marT="45720" marB="45720" anchor="ctr">
+                  <a:tcPr anchor="ctr">
                     <a:lnL w="12700" cap="flat" cmpd="sng" algn="ctr">
                       <a:solidFill>
                         <a:srgbClr val="252B44"/>
@@ -6571,11 +6590,11 @@
                     <a:bodyPr/>
                     <a:lstStyle/>
                     <a:p>
-                      <a:pPr algn="ctr" indent="0" marL="0">
+                      <a:pPr marL="0" indent="0" algn="ctr">
                         <a:buNone/>
                       </a:pPr>
                       <a:r>
-                        <a:rPr lang="en-US" sz="1200" dirty="0">
+                        <a:rPr lang="en-US" sz="1200" dirty="0" smtClean="0">
                           <a:solidFill>
                             <a:srgbClr val="FFFFFF"/>
                           </a:solidFill>
@@ -6583,7 +6602,7 @@
                           <a:ea typeface="Arial" pitchFamily="34" charset="-122"/>
                           <a:cs typeface="Arial" pitchFamily="34" charset="-120"/>
                         </a:rPr>
-                        <a:t>02</a:t>
+                        <a:t>21</a:t>
                       </a:r>
                       <a:endParaRPr lang="en-US" sz="1200" dirty="0">
                         <a:latin typeface="Arial" charset="0"/>
@@ -6592,7 +6611,7 @@
                       </a:endParaRPr>
                     </a:p>
                   </a:txBody>
-                  <a:tcPr marL="91440" marR="91440" marT="45720" marB="45720" anchor="ctr">
+                  <a:tcPr anchor="ctr">
                     <a:lnL w="12700" cap="flat" cmpd="sng" algn="ctr">
                       <a:solidFill>
                         <a:srgbClr val="252B44"/>
@@ -6639,11 +6658,11 @@
                     <a:bodyPr/>
                     <a:lstStyle/>
                     <a:p>
-                      <a:pPr algn="ctr" indent="0" marL="0">
+                      <a:pPr marL="0" indent="0" algn="ctr">
                         <a:buNone/>
                       </a:pPr>
                       <a:r>
-                        <a:rPr lang="en-US" sz="1200" dirty="0">
+                        <a:rPr lang="en-US" sz="1200" dirty="0" err="1" smtClean="0">
                           <a:solidFill>
                             <a:srgbClr val="FFFFFF"/>
                           </a:solidFill>
@@ -6651,7 +6670,29 @@
                           <a:ea typeface="Arial" pitchFamily="34" charset="-122"/>
                           <a:cs typeface="Arial" pitchFamily="34" charset="-120"/>
                         </a:rPr>
-                        <a:t>Abhimanyu Mukherjee</a:t>
+                        <a:t>Grahesh</a:t>
+                      </a:r>
+                      <a:r>
+                        <a:rPr lang="en-US" sz="1200" dirty="0" smtClean="0">
+                          <a:solidFill>
+                            <a:srgbClr val="FFFFFF"/>
+                          </a:solidFill>
+                          <a:latin typeface="Arial" pitchFamily="34" charset="0"/>
+                          <a:ea typeface="Arial" pitchFamily="34" charset="-122"/>
+                          <a:cs typeface="Arial" pitchFamily="34" charset="-120"/>
+                        </a:rPr>
+                        <a:t> </a:t>
+                      </a:r>
+                      <a:r>
+                        <a:rPr lang="en-US" sz="1200" dirty="0" err="1" smtClean="0">
+                          <a:solidFill>
+                            <a:srgbClr val="FFFFFF"/>
+                          </a:solidFill>
+                          <a:latin typeface="Arial" pitchFamily="34" charset="0"/>
+                          <a:ea typeface="Arial" pitchFamily="34" charset="-122"/>
+                          <a:cs typeface="Arial" pitchFamily="34" charset="-120"/>
+                        </a:rPr>
+                        <a:t>Mayekar</a:t>
                       </a:r>
                       <a:endParaRPr lang="en-US" sz="1200" dirty="0">
                         <a:latin typeface="Arial" charset="0"/>
@@ -6660,7 +6701,7 @@
                       </a:endParaRPr>
                     </a:p>
                   </a:txBody>
-                  <a:tcPr marL="91440" marR="91440" marT="45720" marB="45720" anchor="ctr">
+                  <a:tcPr anchor="ctr">
                     <a:lnL w="12700" cap="flat" cmpd="sng" algn="ctr">
                       <a:solidFill>
                         <a:srgbClr val="252B44"/>
@@ -6707,7 +6748,7 @@
                     <a:bodyPr/>
                     <a:lstStyle/>
                     <a:p>
-                      <a:pPr algn="ctr" indent="0" marL="0">
+                      <a:pPr marL="0" indent="0" algn="ctr">
                         <a:buNone/>
                       </a:pPr>
                       <a:r>
@@ -6728,7 +6769,7 @@
                       </a:endParaRPr>
                     </a:p>
                   </a:txBody>
-                  <a:tcPr marL="91440" marR="91440" marT="45720" marB="45720" anchor="ctr">
+                  <a:tcPr anchor="ctr">
                     <a:lnL w="12700" cap="flat" cmpd="sng" algn="ctr">
                       <a:solidFill>
                         <a:srgbClr val="252B44"/>
@@ -6775,7 +6816,7 @@
                     <a:bodyPr/>
                     <a:lstStyle/>
                     <a:p>
-                      <a:pPr algn="ctr" indent="0" marL="0">
+                      <a:pPr marL="0" indent="0" algn="ctr">
                         <a:buNone/>
                       </a:pPr>
                       <a:r>
@@ -6796,7 +6837,7 @@
                       </a:endParaRPr>
                     </a:p>
                   </a:txBody>
-                  <a:tcPr marL="91440" marR="91440" marT="45720" marB="45720" anchor="ctr">
+                  <a:tcPr anchor="ctr">
                     <a:lnL w="12700" cap="flat" cmpd="sng" algn="ctr">
                       <a:solidFill>
                         <a:srgbClr val="252B44"/>
@@ -6843,28 +6884,31 @@
                     <a:bodyPr/>
                     <a:lstStyle/>
                     <a:p>
-                      <a:pPr algn="ctr" indent="0" marL="0">
+                      <a:pPr marL="0" indent="0" algn="ctr">
                         <a:buNone/>
                       </a:pPr>
                       <a:r>
-                        <a:rPr lang="en-US" sz="1200" dirty="0">
+                        <a:rPr lang="en-US" sz="4400" dirty="0" smtClean="0">
                           <a:solidFill>
-                            <a:srgbClr val="FFFFFF"/>
+                            <a:schemeClr val="bg1"/>
                           </a:solidFill>
-                          <a:latin typeface="Arial" pitchFamily="34" charset="0"/>
-                          <a:ea typeface="Arial" pitchFamily="34" charset="-122"/>
-                          <a:cs typeface="Arial" pitchFamily="34" charset="-120"/>
+                          <a:latin typeface="Arial" charset="0"/>
+                          <a:ea typeface="Arial" charset="0"/>
+                          <a:cs typeface="Arial" charset="0"/>
                         </a:rPr>
-                        <a:t>903974@nm.balbharati.org</a:t>
+                        <a:t>−</a:t>
                       </a:r>
-                      <a:endParaRPr lang="en-US" sz="1200" dirty="0">
+                      <a:endParaRPr lang="en-US" sz="4400" dirty="0">
+                        <a:solidFill>
+                          <a:schemeClr val="bg1"/>
+                        </a:solidFill>
                         <a:latin typeface="Arial" charset="0"/>
                         <a:ea typeface="Arial" charset="0"/>
                         <a:cs typeface="Arial" charset="0"/>
                       </a:endParaRPr>
                     </a:p>
                   </a:txBody>
-                  <a:tcPr marL="91440" marR="91440" marT="45720" marB="45720" anchor="ctr">
+                  <a:tcPr anchor="ctr">
                     <a:lnL w="12700" cap="flat" cmpd="sng" algn="ctr">
                       <a:solidFill>
                         <a:srgbClr val="252B44"/>
@@ -6906,416 +6950,11 @@
                     </a:solidFill>
                   </a:tcPr>
                 </a:tc>
-              </a:tr>
-              <a:tr h="768096">
-                <a:tc>
-                  <a:txBody>
-                    <a:bodyPr/>
-                    <a:lstStyle/>
-                    <a:p>
-                      <a:pPr algn="ctr" indent="0" marL="0">
-                        <a:buNone/>
-                      </a:pPr>
-                      <a:r>
-                        <a:rPr lang="en-US" sz="1200" dirty="0">
-                          <a:solidFill>
-                            <a:srgbClr val="FFFFFF"/>
-                          </a:solidFill>
-                          <a:latin typeface="Arial" pitchFamily="34" charset="0"/>
-                          <a:ea typeface="Arial" pitchFamily="34" charset="-122"/>
-                          <a:cs typeface="Arial" pitchFamily="34" charset="-120"/>
-                        </a:rPr>
-                        <a:t>4</a:t>
-                      </a:r>
-                      <a:endParaRPr lang="en-US" sz="1200" dirty="0">
-                        <a:latin typeface="Arial" charset="0"/>
-                        <a:ea typeface="Arial" charset="0"/>
-                        <a:cs typeface="Arial" charset="0"/>
-                      </a:endParaRPr>
-                    </a:p>
-                  </a:txBody>
-                  <a:tcPr marL="91440" marR="91440" marT="45720" marB="45720" anchor="ctr">
-                    <a:lnL w="12700" cap="flat" cmpd="sng" algn="ctr">
-                      <a:solidFill>
-                        <a:srgbClr val="252B44"/>
-                      </a:solidFill>
-                      <a:prstDash val="solid"/>
-                      <a:round/>
-                      <a:headEnd type="none" w="med" len="med"/>
-                      <a:tailEnd type="none" w="med" len="med"/>
-                    </a:lnL>
-                    <a:lnR w="12700" cap="flat" cmpd="sng" algn="ctr">
-                      <a:solidFill>
-                        <a:srgbClr val="252B44"/>
-                      </a:solidFill>
-                      <a:prstDash val="solid"/>
-                      <a:round/>
-                      <a:headEnd type="none" w="med" len="med"/>
-                      <a:tailEnd type="none" w="med" len="med"/>
-                    </a:lnR>
-                    <a:lnT w="12700" cap="flat" cmpd="sng" algn="ctr">
-                      <a:solidFill>
-                        <a:srgbClr val="252B44"/>
-                      </a:solidFill>
-                      <a:prstDash val="solid"/>
-                      <a:round/>
-                      <a:headEnd type="none" w="med" len="med"/>
-                      <a:tailEnd type="none" w="med" len="med"/>
-                    </a:lnT>
-                    <a:lnB w="12700" cap="flat" cmpd="sng" algn="ctr">
-                      <a:solidFill>
-                        <a:srgbClr val="252B44"/>
-                      </a:solidFill>
-                      <a:prstDash val="solid"/>
-                      <a:round/>
-                      <a:headEnd type="none" w="med" len="med"/>
-                      <a:tailEnd type="none" w="med" len="med"/>
-                    </a:lnB>
-                    <a:solidFill>
-                      <a:srgbClr val="0C0F1D"/>
-                    </a:solidFill>
-                  </a:tcPr>
-                </a:tc>
-                <a:tc>
-                  <a:txBody>
-                    <a:bodyPr/>
-                    <a:lstStyle/>
-                    <a:p>
-                      <a:pPr algn="ctr" indent="0" marL="0">
-                        <a:buNone/>
-                      </a:pPr>
-                      <a:r>
-                        <a:rPr lang="en-US" sz="1200" dirty="0">
-                          <a:solidFill>
-                            <a:srgbClr val="FFFFFF"/>
-                          </a:solidFill>
-                          <a:latin typeface="Arial" pitchFamily="34" charset="0"/>
-                          <a:ea typeface="Arial" pitchFamily="34" charset="-122"/>
-                          <a:cs typeface="Arial" pitchFamily="34" charset="-120"/>
-                        </a:rPr>
-                        <a:t>44</a:t>
-                      </a:r>
-                      <a:endParaRPr lang="en-US" sz="1200" dirty="0">
-                        <a:latin typeface="Arial" charset="0"/>
-                        <a:ea typeface="Arial" charset="0"/>
-                        <a:cs typeface="Arial" charset="0"/>
-                      </a:endParaRPr>
-                    </a:p>
-                  </a:txBody>
-                  <a:tcPr marL="91440" marR="91440" marT="45720" marB="45720" anchor="ctr">
-                    <a:lnL w="12700" cap="flat" cmpd="sng" algn="ctr">
-                      <a:solidFill>
-                        <a:srgbClr val="252B44"/>
-                      </a:solidFill>
-                      <a:prstDash val="solid"/>
-                      <a:round/>
-                      <a:headEnd type="none" w="med" len="med"/>
-                      <a:tailEnd type="none" w="med" len="med"/>
-                    </a:lnL>
-                    <a:lnR w="12700" cap="flat" cmpd="sng" algn="ctr">
-                      <a:solidFill>
-                        <a:srgbClr val="252B44"/>
-                      </a:solidFill>
-                      <a:prstDash val="solid"/>
-                      <a:round/>
-                      <a:headEnd type="none" w="med" len="med"/>
-                      <a:tailEnd type="none" w="med" len="med"/>
-                    </a:lnR>
-                    <a:lnT w="12700" cap="flat" cmpd="sng" algn="ctr">
-                      <a:solidFill>
-                        <a:srgbClr val="252B44"/>
-                      </a:solidFill>
-                      <a:prstDash val="solid"/>
-                      <a:round/>
-                      <a:headEnd type="none" w="med" len="med"/>
-                      <a:tailEnd type="none" w="med" len="med"/>
-                    </a:lnT>
-                    <a:lnB w="12700" cap="flat" cmpd="sng" algn="ctr">
-                      <a:solidFill>
-                        <a:srgbClr val="252B44"/>
-                      </a:solidFill>
-                      <a:prstDash val="solid"/>
-                      <a:round/>
-                      <a:headEnd type="none" w="med" len="med"/>
-                      <a:tailEnd type="none" w="med" len="med"/>
-                    </a:lnB>
-                    <a:solidFill>
-                      <a:srgbClr val="0C0F1D"/>
-                    </a:solidFill>
-                  </a:tcPr>
-                </a:tc>
-                <a:tc>
-                  <a:txBody>
-                    <a:bodyPr/>
-                    <a:lstStyle/>
-                    <a:p>
-                      <a:pPr algn="ctr" indent="0" marL="0">
-                        <a:buNone/>
-                      </a:pPr>
-                      <a:r>
-                        <a:rPr lang="en-US" sz="1200" dirty="0">
-                          <a:solidFill>
-                            <a:srgbClr val="FFFFFF"/>
-                          </a:solidFill>
-                          <a:latin typeface="Arial" pitchFamily="34" charset="0"/>
-                          <a:ea typeface="Arial" pitchFamily="34" charset="-122"/>
-                          <a:cs typeface="Arial" pitchFamily="34" charset="-120"/>
-                        </a:rPr>
-                        <a:t>Revanth Vutukuru</a:t>
-                      </a:r>
-                      <a:endParaRPr lang="en-US" sz="1200" dirty="0">
-                        <a:latin typeface="Arial" charset="0"/>
-                        <a:ea typeface="Arial" charset="0"/>
-                        <a:cs typeface="Arial" charset="0"/>
-                      </a:endParaRPr>
-                    </a:p>
-                  </a:txBody>
-                  <a:tcPr marL="91440" marR="91440" marT="45720" marB="45720" anchor="ctr">
-                    <a:lnL w="12700" cap="flat" cmpd="sng" algn="ctr">
-                      <a:solidFill>
-                        <a:srgbClr val="252B44"/>
-                      </a:solidFill>
-                      <a:prstDash val="solid"/>
-                      <a:round/>
-                      <a:headEnd type="none" w="med" len="med"/>
-                      <a:tailEnd type="none" w="med" len="med"/>
-                    </a:lnL>
-                    <a:lnR w="12700" cap="flat" cmpd="sng" algn="ctr">
-                      <a:solidFill>
-                        <a:srgbClr val="252B44"/>
-                      </a:solidFill>
-                      <a:prstDash val="solid"/>
-                      <a:round/>
-                      <a:headEnd type="none" w="med" len="med"/>
-                      <a:tailEnd type="none" w="med" len="med"/>
-                    </a:lnR>
-                    <a:lnT w="12700" cap="flat" cmpd="sng" algn="ctr">
-                      <a:solidFill>
-                        <a:srgbClr val="252B44"/>
-                      </a:solidFill>
-                      <a:prstDash val="solid"/>
-                      <a:round/>
-                      <a:headEnd type="none" w="med" len="med"/>
-                      <a:tailEnd type="none" w="med" len="med"/>
-                    </a:lnT>
-                    <a:lnB w="12700" cap="flat" cmpd="sng" algn="ctr">
-                      <a:solidFill>
-                        <a:srgbClr val="252B44"/>
-                      </a:solidFill>
-                      <a:prstDash val="solid"/>
-                      <a:round/>
-                      <a:headEnd type="none" w="med" len="med"/>
-                      <a:tailEnd type="none" w="med" len="med"/>
-                    </a:lnB>
-                    <a:solidFill>
-                      <a:srgbClr val="0C0F1D"/>
-                    </a:solidFill>
-                  </a:tcPr>
-                </a:tc>
-                <a:tc>
-                  <a:txBody>
-                    <a:bodyPr/>
-                    <a:lstStyle/>
-                    <a:p>
-                      <a:pPr algn="ctr" indent="0" marL="0">
-                        <a:buNone/>
-                      </a:pPr>
-                      <a:r>
-                        <a:rPr lang="en-US" sz="1200" dirty="0">
-                          <a:solidFill>
-                            <a:srgbClr val="FFFFFF"/>
-                          </a:solidFill>
-                          <a:latin typeface="Arial" pitchFamily="34" charset="0"/>
-                          <a:ea typeface="Arial" pitchFamily="34" charset="-122"/>
-                          <a:cs typeface="Arial" pitchFamily="34" charset="-120"/>
-                        </a:rPr>
-                        <a:t>10 D</a:t>
-                      </a:r>
-                      <a:endParaRPr lang="en-US" sz="1200" dirty="0">
-                        <a:latin typeface="Arial" charset="0"/>
-                        <a:ea typeface="Arial" charset="0"/>
-                        <a:cs typeface="Arial" charset="0"/>
-                      </a:endParaRPr>
-                    </a:p>
-                  </a:txBody>
-                  <a:tcPr marL="91440" marR="91440" marT="45720" marB="45720" anchor="ctr">
-                    <a:lnL w="12700" cap="flat" cmpd="sng" algn="ctr">
-                      <a:solidFill>
-                        <a:srgbClr val="252B44"/>
-                      </a:solidFill>
-                      <a:prstDash val="solid"/>
-                      <a:round/>
-                      <a:headEnd type="none" w="med" len="med"/>
-                      <a:tailEnd type="none" w="med" len="med"/>
-                    </a:lnL>
-                    <a:lnR w="12700" cap="flat" cmpd="sng" algn="ctr">
-                      <a:solidFill>
-                        <a:srgbClr val="252B44"/>
-                      </a:solidFill>
-                      <a:prstDash val="solid"/>
-                      <a:round/>
-                      <a:headEnd type="none" w="med" len="med"/>
-                      <a:tailEnd type="none" w="med" len="med"/>
-                    </a:lnR>
-                    <a:lnT w="12700" cap="flat" cmpd="sng" algn="ctr">
-                      <a:solidFill>
-                        <a:srgbClr val="252B44"/>
-                      </a:solidFill>
-                      <a:prstDash val="solid"/>
-                      <a:round/>
-                      <a:headEnd type="none" w="med" len="med"/>
-                      <a:tailEnd type="none" w="med" len="med"/>
-                    </a:lnT>
-                    <a:lnB w="12700" cap="flat" cmpd="sng" algn="ctr">
-                      <a:solidFill>
-                        <a:srgbClr val="252B44"/>
-                      </a:solidFill>
-                      <a:prstDash val="solid"/>
-                      <a:round/>
-                      <a:headEnd type="none" w="med" len="med"/>
-                      <a:tailEnd type="none" w="med" len="med"/>
-                    </a:lnB>
-                    <a:solidFill>
-                      <a:srgbClr val="0C0F1D"/>
-                    </a:solidFill>
-                  </a:tcPr>
-                </a:tc>
-                <a:tc>
-                  <a:txBody>
-                    <a:bodyPr/>
-                    <a:lstStyle/>
-                    <a:p>
-                      <a:pPr algn="ctr" indent="0" marL="0">
-                        <a:buNone/>
-                      </a:pPr>
-                      <a:r>
-                        <a:rPr lang="en-US" sz="1200" dirty="0">
-                          <a:solidFill>
-                            <a:srgbClr val="FFFFFF"/>
-                          </a:solidFill>
-                          <a:latin typeface="Arial" pitchFamily="34" charset="0"/>
-                          <a:ea typeface="Arial" pitchFamily="34" charset="-122"/>
-                          <a:cs typeface="Arial" pitchFamily="34" charset="-120"/>
-                        </a:rPr>
-                        <a:t>Male</a:t>
-                      </a:r>
-                      <a:endParaRPr lang="en-US" sz="1200" dirty="0">
-                        <a:latin typeface="Arial" charset="0"/>
-                        <a:ea typeface="Arial" charset="0"/>
-                        <a:cs typeface="Arial" charset="0"/>
-                      </a:endParaRPr>
-                    </a:p>
-                  </a:txBody>
-                  <a:tcPr marL="91440" marR="91440" marT="45720" marB="45720" anchor="ctr">
-                    <a:lnL w="12700" cap="flat" cmpd="sng" algn="ctr">
-                      <a:solidFill>
-                        <a:srgbClr val="252B44"/>
-                      </a:solidFill>
-                      <a:prstDash val="solid"/>
-                      <a:round/>
-                      <a:headEnd type="none" w="med" len="med"/>
-                      <a:tailEnd type="none" w="med" len="med"/>
-                    </a:lnL>
-                    <a:lnR w="12700" cap="flat" cmpd="sng" algn="ctr">
-                      <a:solidFill>
-                        <a:srgbClr val="252B44"/>
-                      </a:solidFill>
-                      <a:prstDash val="solid"/>
-                      <a:round/>
-                      <a:headEnd type="none" w="med" len="med"/>
-                      <a:tailEnd type="none" w="med" len="med"/>
-                    </a:lnR>
-                    <a:lnT w="12700" cap="flat" cmpd="sng" algn="ctr">
-                      <a:solidFill>
-                        <a:srgbClr val="252B44"/>
-                      </a:solidFill>
-                      <a:prstDash val="solid"/>
-                      <a:round/>
-                      <a:headEnd type="none" w="med" len="med"/>
-                      <a:tailEnd type="none" w="med" len="med"/>
-                    </a:lnT>
-                    <a:lnB w="12700" cap="flat" cmpd="sng" algn="ctr">
-                      <a:solidFill>
-                        <a:srgbClr val="252B44"/>
-                      </a:solidFill>
-                      <a:prstDash val="solid"/>
-                      <a:round/>
-                      <a:headEnd type="none" w="med" len="med"/>
-                      <a:tailEnd type="none" w="med" len="med"/>
-                    </a:lnB>
-                    <a:solidFill>
-                      <a:srgbClr val="0C0F1D"/>
-                    </a:solidFill>
-                  </a:tcPr>
-                </a:tc>
-                <a:tc>
-                  <a:txBody>
-                    <a:bodyPr/>
-                    <a:lstStyle/>
-                    <a:p>
-                      <a:pPr algn="ctr" indent="0" marL="0">
-                        <a:buNone/>
-                      </a:pPr>
-                      <a:r>
-                        <a:rPr lang="en-US" sz="1200" dirty="0">
-                          <a:solidFill>
-                            <a:srgbClr val="FFFFFF"/>
-                          </a:solidFill>
-                          <a:latin typeface="Arial" pitchFamily="34" charset="0"/>
-                          <a:ea typeface="Arial" pitchFamily="34" charset="-122"/>
-                          <a:cs typeface="Arial" pitchFamily="34" charset="-120"/>
-                        </a:rPr>
-                        <a:t>Revanth.vutu09@gmail.com / 903878@nm.balbharati.org</a:t>
-                      </a:r>
-                      <a:endParaRPr lang="en-US" sz="1200" dirty="0">
-                        <a:latin typeface="Arial" charset="0"/>
-                        <a:ea typeface="Arial" charset="0"/>
-                        <a:cs typeface="Arial" charset="0"/>
-                      </a:endParaRPr>
-                    </a:p>
-                  </a:txBody>
-                  <a:tcPr marL="91440" marR="91440" marT="45720" marB="45720" anchor="ctr">
-                    <a:lnL w="12700" cap="flat" cmpd="sng" algn="ctr">
-                      <a:solidFill>
-                        <a:srgbClr val="252B44"/>
-                      </a:solidFill>
-                      <a:prstDash val="solid"/>
-                      <a:round/>
-                      <a:headEnd type="none" w="med" len="med"/>
-                      <a:tailEnd type="none" w="med" len="med"/>
-                    </a:lnL>
-                    <a:lnR w="12700" cap="flat" cmpd="sng" algn="ctr">
-                      <a:solidFill>
-                        <a:srgbClr val="252B44"/>
-                      </a:solidFill>
-                      <a:prstDash val="solid"/>
-                      <a:round/>
-                      <a:headEnd type="none" w="med" len="med"/>
-                      <a:tailEnd type="none" w="med" len="med"/>
-                    </a:lnR>
-                    <a:lnT w="12700" cap="flat" cmpd="sng" algn="ctr">
-                      <a:solidFill>
-                        <a:srgbClr val="252B44"/>
-                      </a:solidFill>
-                      <a:prstDash val="solid"/>
-                      <a:round/>
-                      <a:headEnd type="none" w="med" len="med"/>
-                      <a:tailEnd type="none" w="med" len="med"/>
-                    </a:lnT>
-                    <a:lnB w="12700" cap="flat" cmpd="sng" algn="ctr">
-                      <a:solidFill>
-                        <a:srgbClr val="252B44"/>
-                      </a:solidFill>
-                      <a:prstDash val="solid"/>
-                      <a:round/>
-                      <a:headEnd type="none" w="med" len="med"/>
-                      <a:tailEnd type="none" w="med" len="med"/>
-                    </a:lnB>
-                    <a:solidFill>
-                      <a:srgbClr val="0C0F1D"/>
-                    </a:solidFill>
-                  </a:tcPr>
-                </a:tc>
+                <a:extLst>
+                  <a:ext uri="{0D108BD9-81ED-4DB2-BD59-A6C34878D82A}">
+                    <a16:rowId xmlns:a16="http://schemas.microsoft.com/office/drawing/2014/main" val="10003"/>
+                  </a:ext>
+                </a:extLst>
               </a:tr>
             </a:tbl>
           </a:graphicData>
@@ -7342,7 +6981,7 @@
           <a:bodyPr wrap="square" rtlCol="0" anchor="ctr"/>
           <a:lstStyle/>
           <a:p>
-            <a:pPr algn="ctr" indent="0" marL="0">
+            <a:pPr marL="0" indent="0" algn="ctr">
               <a:buNone/>
             </a:pPr>
             <a:r>
@@ -7376,6 +7015,7 @@
         <a:solidFill>
           <a:srgbClr val="03050C"/>
         </a:solidFill>
+        <a:effectLst/>
       </p:bgPr>
     </p:bg>
     <p:spTree>
@@ -7413,7 +7053,7 @@
           <a:bodyPr wrap="square" rtlCol="0" anchor="ctr"/>
           <a:lstStyle/>
           <a:p>
-            <a:pPr indent="0" marL="0">
+            <a:pPr marL="0" indent="0">
               <a:buNone/>
             </a:pPr>
             <a:r>
@@ -7497,7 +7137,7 @@
           <a:bodyPr wrap="square" rtlCol="0" anchor="ctr"/>
           <a:lstStyle/>
           <a:p>
-            <a:pPr algn="ctr" indent="0" marL="0">
+            <a:pPr marL="0" indent="0" algn="ctr">
               <a:buNone/>
             </a:pPr>
             <a:r>
@@ -7601,7 +7241,7 @@
           <a:bodyPr wrap="square" rtlCol="0" anchor="ctr"/>
           <a:lstStyle/>
           <a:p>
-            <a:pPr algn="ctr" indent="0" marL="0">
+            <a:pPr marL="0" indent="0" algn="ctr">
               <a:lnSpc>
                 <a:spcPts val="1400"/>
               </a:lnSpc>
@@ -7621,7 +7261,7 @@
             <a:endParaRPr lang="en-US" sz="1100" dirty="0"/>
           </a:p>
           <a:p>
-            <a:pPr algn="ctr" indent="0" marL="0">
+            <a:pPr marL="0" indent="0" algn="ctr">
               <a:lnSpc>
                 <a:spcPts val="1400"/>
               </a:lnSpc>
@@ -7645,7 +7285,7 @@
       <p:sp>
         <p:nvSpPr>
           <p:cNvPr id="10" name="Text 8">
-            <a:hlinkClick r:id="rId1" tooltip=""/>
+            <a:hlinkClick r:id="rId3"/>
           </p:cNvPr>
           <p:cNvSpPr/>
           <p:nvPr/>
@@ -7665,7 +7305,7 @@
           <a:bodyPr wrap="square" rtlCol="0" anchor="ctr"/>
           <a:lstStyle/>
           <a:p>
-            <a:pPr algn="ctr" indent="0" marL="0">
+            <a:pPr marL="0" indent="0" algn="ctr">
               <a:buNone/>
             </a:pPr>
             <a:r>
@@ -7676,10 +7316,10 @@
                 <a:latin typeface="Arial" pitchFamily="34" charset="0"/>
                 <a:ea typeface="Arial" pitchFamily="34" charset="-122"/>
                 <a:cs typeface="Arial" pitchFamily="34" charset="-120"/>
-                <a:hlinkClick r:id="rId1" invalidUrl="" action="" tgtFrame="" tooltip="" history="1" highlightClick="0" endSnd="0">
+                <a:hlinkClick r:id="rId3">
                   <a:extLst>
                     <a:ext uri="{A12FA001-AC4F-418D-AE19-62706E023703}">
-                      <ahyp:hlinkClr xmlns:ahyp="http://schemas.microsoft.com/office/drawing/2018/hyperlinkcolor" val="tx"/>
+                      <ahyp:hlinkClr xmlns:ahyp="http://schemas.microsoft.com/office/drawing/2018/hyperlinkcolor" xmlns="" val="tx"/>
                     </a:ext>
                   </a:extLst>
                 </a:hlinkClick>
@@ -7706,6 +7346,7 @@
         <a:solidFill>
           <a:srgbClr val="03050C"/>
         </a:solidFill>
+        <a:effectLst/>
       </p:bgPr>
     </p:bg>
     <p:spTree>
@@ -7743,7 +7384,7 @@
           <a:bodyPr wrap="square" rtlCol="0" anchor="ctr"/>
           <a:lstStyle/>
           <a:p>
-            <a:pPr indent="0" marL="0">
+            <a:pPr marL="0" indent="0">
               <a:buNone/>
             </a:pPr>
             <a:r>
@@ -7827,7 +7468,7 @@
           <a:bodyPr wrap="square" rtlCol="0" anchor="ctr"/>
           <a:lstStyle/>
           <a:p>
-            <a:pPr indent="0" marL="0">
+            <a:pPr marL="0" indent="0">
               <a:lnSpc>
                 <a:spcPts val="1300"/>
               </a:lnSpc>
@@ -7847,7 +7488,7 @@
             <a:endParaRPr lang="en-US" sz="1050" dirty="0"/>
           </a:p>
           <a:p>
-            <a:pPr indent="0" marL="0">
+            <a:pPr marL="0" indent="0">
               <a:lnSpc>
                 <a:spcPts val="1300"/>
               </a:lnSpc>
@@ -7867,7 +7508,7 @@
             <a:endParaRPr lang="en-US" sz="1050" dirty="0"/>
           </a:p>
           <a:p>
-            <a:pPr indent="0" marL="0">
+            <a:pPr marL="0" indent="0">
               <a:lnSpc>
                 <a:spcPts val="1300"/>
               </a:lnSpc>
@@ -7887,7 +7528,7 @@
             <a:endParaRPr lang="en-US" sz="1050" dirty="0"/>
           </a:p>
           <a:p>
-            <a:pPr indent="0" marL="0">
+            <a:pPr marL="0" indent="0">
               <a:lnSpc>
                 <a:spcPts val="1300"/>
               </a:lnSpc>
@@ -7907,7 +7548,7 @@
             <a:endParaRPr lang="en-US" sz="1050" dirty="0"/>
           </a:p>
           <a:p>
-            <a:pPr indent="0" marL="0">
+            <a:pPr marL="0" indent="0">
               <a:lnSpc>
                 <a:spcPts val="1300"/>
               </a:lnSpc>
@@ -7927,7 +7568,7 @@
             <a:endParaRPr lang="en-US" sz="1050" dirty="0"/>
           </a:p>
           <a:p>
-            <a:pPr indent="0" marL="0">
+            <a:pPr marL="0" indent="0">
               <a:lnSpc>
                 <a:spcPts val="1300"/>
               </a:lnSpc>
@@ -7947,7 +7588,7 @@
             <a:endParaRPr lang="en-US" sz="1050" dirty="0"/>
           </a:p>
           <a:p>
-            <a:pPr indent="0" marL="0">
+            <a:pPr marL="0" indent="0">
               <a:lnSpc>
                 <a:spcPts val="1300"/>
               </a:lnSpc>
@@ -7967,7 +7608,7 @@
             <a:endParaRPr lang="en-US" sz="1050" dirty="0"/>
           </a:p>
           <a:p>
-            <a:pPr indent="0" marL="0">
+            <a:pPr marL="0" indent="0">
               <a:lnSpc>
                 <a:spcPts val="1300"/>
               </a:lnSpc>
@@ -7987,7 +7628,7 @@
             <a:endParaRPr lang="en-US" sz="1050" dirty="0"/>
           </a:p>
           <a:p>
-            <a:pPr indent="0" marL="0">
+            <a:pPr marL="0" indent="0">
               <a:lnSpc>
                 <a:spcPts val="1300"/>
               </a:lnSpc>
@@ -8007,7 +7648,7 @@
             <a:endParaRPr lang="en-US" sz="1050" dirty="0"/>
           </a:p>
           <a:p>
-            <a:pPr indent="0" marL="0">
+            <a:pPr marL="0" indent="0">
               <a:lnSpc>
                 <a:spcPts val="1300"/>
               </a:lnSpc>
@@ -8027,7 +7668,7 @@
             <a:endParaRPr lang="en-US" sz="1050" dirty="0"/>
           </a:p>
           <a:p>
-            <a:pPr indent="0" marL="0">
+            <a:pPr marL="0" indent="0">
               <a:lnSpc>
                 <a:spcPts val="1300"/>
               </a:lnSpc>
@@ -8036,7 +7677,7 @@
             <a:endParaRPr lang="en-US" sz="1050" dirty="0"/>
           </a:p>
           <a:p>
-            <a:pPr indent="0" marL="0">
+            <a:pPr marL="0" indent="0">
               <a:lnSpc>
                 <a:spcPts val="1300"/>
               </a:lnSpc>
@@ -8056,7 +7697,7 @@
             <a:endParaRPr lang="en-US" sz="1050" dirty="0"/>
           </a:p>
           <a:p>
-            <a:pPr indent="0" marL="0">
+            <a:pPr marL="0" indent="0">
               <a:lnSpc>
                 <a:spcPts val="1300"/>
               </a:lnSpc>
@@ -8076,7 +7717,7 @@
             <a:endParaRPr lang="en-US" sz="1050" dirty="0"/>
           </a:p>
           <a:p>
-            <a:pPr indent="0" marL="0">
+            <a:pPr marL="0" indent="0">
               <a:lnSpc>
                 <a:spcPts val="1300"/>
               </a:lnSpc>
@@ -8096,7 +7737,7 @@
             <a:endParaRPr lang="en-US" sz="1050" dirty="0"/>
           </a:p>
           <a:p>
-            <a:pPr indent="0" marL="0">
+            <a:pPr marL="0" indent="0">
               <a:lnSpc>
                 <a:spcPts val="1300"/>
               </a:lnSpc>
@@ -8116,7 +7757,7 @@
             <a:endParaRPr lang="en-US" sz="1050" dirty="0"/>
           </a:p>
           <a:p>
-            <a:pPr indent="0" marL="0">
+            <a:pPr marL="0" indent="0">
               <a:lnSpc>
                 <a:spcPts val="1300"/>
               </a:lnSpc>
@@ -8136,7 +7777,7 @@
             <a:endParaRPr lang="en-US" sz="1050" dirty="0"/>
           </a:p>
           <a:p>
-            <a:pPr indent="0" marL="0">
+            <a:pPr marL="0" indent="0">
               <a:lnSpc>
                 <a:spcPts val="1300"/>
               </a:lnSpc>
@@ -8156,7 +7797,7 @@
             <a:endParaRPr lang="en-US" sz="1050" dirty="0"/>
           </a:p>
           <a:p>
-            <a:pPr indent="0" marL="0">
+            <a:pPr marL="0" indent="0">
               <a:lnSpc>
                 <a:spcPts val="1300"/>
               </a:lnSpc>
@@ -8176,7 +7817,7 @@
             <a:endParaRPr lang="en-US" sz="1050" dirty="0"/>
           </a:p>
           <a:p>
-            <a:pPr indent="0" marL="0">
+            <a:pPr marL="0" indent="0">
               <a:lnSpc>
                 <a:spcPts val="1300"/>
               </a:lnSpc>
@@ -8196,7 +7837,7 @@
             <a:endParaRPr lang="en-US" sz="1050" dirty="0"/>
           </a:p>
           <a:p>
-            <a:pPr indent="0" marL="0">
+            <a:pPr marL="0" indent="0">
               <a:lnSpc>
                 <a:spcPts val="1300"/>
               </a:lnSpc>
@@ -8205,7 +7846,7 @@
             <a:endParaRPr lang="en-US" sz="1050" dirty="0"/>
           </a:p>
           <a:p>
-            <a:pPr indent="0" marL="0">
+            <a:pPr marL="0" indent="0">
               <a:lnSpc>
                 <a:spcPts val="1300"/>
               </a:lnSpc>
@@ -8225,7 +7866,7 @@
             <a:endParaRPr lang="en-US" sz="1050" dirty="0"/>
           </a:p>
           <a:p>
-            <a:pPr indent="0" marL="0">
+            <a:pPr marL="0" indent="0">
               <a:lnSpc>
                 <a:spcPts val="1300"/>
               </a:lnSpc>
@@ -8245,7 +7886,7 @@
             <a:endParaRPr lang="en-US" sz="1050" dirty="0"/>
           </a:p>
           <a:p>
-            <a:pPr indent="0" marL="0">
+            <a:pPr marL="0" indent="0">
               <a:lnSpc>
                 <a:spcPts val="1300"/>
               </a:lnSpc>
@@ -8265,7 +7906,7 @@
             <a:endParaRPr lang="en-US" sz="1050" dirty="0"/>
           </a:p>
           <a:p>
-            <a:pPr indent="0" marL="0">
+            <a:pPr marL="0" indent="0">
               <a:lnSpc>
                 <a:spcPts val="1300"/>
               </a:lnSpc>
@@ -8332,7 +7973,7 @@
           <a:bodyPr wrap="square" rtlCol="0" anchor="ctr"/>
           <a:lstStyle/>
           <a:p>
-            <a:pPr indent="0" marL="0">
+            <a:pPr marL="0" indent="0">
               <a:buNone/>
             </a:pPr>
             <a:r>
@@ -8371,7 +8012,7 @@
           <a:bodyPr wrap="square" rtlCol="0" anchor="ctr"/>
           <a:lstStyle/>
           <a:p>
-            <a:pPr indent="0" marL="0">
+            <a:pPr marL="0" indent="0">
               <a:lnSpc>
                 <a:spcPts val="1800"/>
               </a:lnSpc>
@@ -8391,7 +8032,7 @@
             <a:endParaRPr lang="en-US" sz="1150" dirty="0"/>
           </a:p>
           <a:p>
-            <a:pPr indent="0" marL="0">
+            <a:pPr marL="0" indent="0">
               <a:lnSpc>
                 <a:spcPts val="1800"/>
               </a:lnSpc>
@@ -8400,7 +8041,7 @@
             <a:endParaRPr lang="en-US" sz="1150" dirty="0"/>
           </a:p>
           <a:p>
-            <a:pPr indent="0" marL="0">
+            <a:pPr marL="0" indent="0">
               <a:lnSpc>
                 <a:spcPts val="1800"/>
               </a:lnSpc>
@@ -8420,7 +8061,7 @@
             <a:endParaRPr lang="en-US" sz="1150" dirty="0"/>
           </a:p>
           <a:p>
-            <a:pPr indent="0" marL="0">
+            <a:pPr marL="0" indent="0">
               <a:lnSpc>
                 <a:spcPts val="1800"/>
               </a:lnSpc>
@@ -8429,7 +8070,7 @@
             <a:endParaRPr lang="en-US" sz="1150" dirty="0"/>
           </a:p>
           <a:p>
-            <a:pPr indent="0" marL="0">
+            <a:pPr marL="0" indent="0">
               <a:lnSpc>
                 <a:spcPts val="1800"/>
               </a:lnSpc>
@@ -8449,7 +8090,7 @@
             <a:endParaRPr lang="en-US" sz="1150" dirty="0"/>
           </a:p>
           <a:p>
-            <a:pPr indent="0" marL="0">
+            <a:pPr marL="0" indent="0">
               <a:lnSpc>
                 <a:spcPts val="1800"/>
               </a:lnSpc>
@@ -8458,7 +8099,7 @@
             <a:endParaRPr lang="en-US" sz="1150" dirty="0"/>
           </a:p>
           <a:p>
-            <a:pPr indent="0" marL="0">
+            <a:pPr marL="0" indent="0">
               <a:lnSpc>
                 <a:spcPts val="1800"/>
               </a:lnSpc>
@@ -8495,6 +8136,7 @@
         <a:solidFill>
           <a:srgbClr val="03050C"/>
         </a:solidFill>
+        <a:effectLst/>
       </p:bgPr>
     </p:bg>
     <p:spTree>
@@ -8532,7 +8174,7 @@
           <a:bodyPr wrap="square" rtlCol="0" anchor="ctr"/>
           <a:lstStyle/>
           <a:p>
-            <a:pPr indent="0" marL="0">
+            <a:pPr marL="0" indent="0">
               <a:buNone/>
             </a:pPr>
             <a:r>
@@ -8616,7 +8258,7 @@
           <a:bodyPr wrap="square" rtlCol="0" anchor="ctr"/>
           <a:lstStyle/>
           <a:p>
-            <a:pPr indent="0" marL="0">
+            <a:pPr marL="0" indent="0">
               <a:buNone/>
             </a:pPr>
             <a:r>
@@ -8637,7 +8279,7 @@
       <p:sp>
         <p:nvSpPr>
           <p:cNvPr id="6" name="Text 4">
-            <a:hlinkClick r:id="rId1" tooltip=""/>
+            <a:hlinkClick r:id="rId3"/>
           </p:cNvPr>
           <p:cNvSpPr/>
           <p:nvPr/>
@@ -8657,7 +8299,7 @@
           <a:bodyPr wrap="square" rtlCol="0" anchor="ctr"/>
           <a:lstStyle/>
           <a:p>
-            <a:pPr indent="0" marL="0">
+            <a:pPr marL="0" indent="0">
               <a:buNone/>
             </a:pPr>
             <a:r>
@@ -8668,10 +8310,10 @@
                 <a:latin typeface="Arial" pitchFamily="34" charset="0"/>
                 <a:ea typeface="Arial" pitchFamily="34" charset="-122"/>
                 <a:cs typeface="Arial" pitchFamily="34" charset="-120"/>
-                <a:hlinkClick r:id="rId1" invalidUrl="" action="" tgtFrame="" tooltip="" history="1" highlightClick="0" endSnd="0">
+                <a:hlinkClick r:id="rId3">
                   <a:extLst>
                     <a:ext uri="{A12FA001-AC4F-418D-AE19-62706E023703}">
-                      <ahyp:hlinkClr xmlns:ahyp="http://schemas.microsoft.com/office/drawing/2018/hyperlinkcolor" val="tx"/>
+                      <ahyp:hlinkClr xmlns:ahyp="http://schemas.microsoft.com/office/drawing/2018/hyperlinkcolor" xmlns="" val="tx"/>
                     </a:ext>
                   </a:extLst>
                 </a:hlinkClick>
@@ -8703,7 +8345,7 @@
           <a:bodyPr wrap="square" rtlCol="0" anchor="ctr"/>
           <a:lstStyle/>
           <a:p>
-            <a:pPr indent="0" marL="0">
+            <a:pPr marL="0" indent="0">
               <a:lnSpc>
                 <a:spcPts val="1800"/>
               </a:lnSpc>
@@ -8723,7 +8365,7 @@
             <a:endParaRPr lang="en-US" sz="1250" dirty="0"/>
           </a:p>
           <a:p>
-            <a:pPr indent="0" marL="0">
+            <a:pPr marL="0" indent="0">
               <a:lnSpc>
                 <a:spcPts val="1800"/>
               </a:lnSpc>
@@ -8732,7 +8374,7 @@
             <a:endParaRPr lang="en-US" sz="1250" dirty="0"/>
           </a:p>
           <a:p>
-            <a:pPr indent="0" marL="0">
+            <a:pPr marL="0" indent="0">
               <a:lnSpc>
                 <a:spcPts val="1800"/>
               </a:lnSpc>
@@ -8752,7 +8394,7 @@
             <a:endParaRPr lang="en-US" sz="1250" dirty="0"/>
           </a:p>
           <a:p>
-            <a:pPr indent="0" marL="0">
+            <a:pPr marL="0" indent="0">
               <a:lnSpc>
                 <a:spcPts val="1800"/>
               </a:lnSpc>
@@ -8761,7 +8403,7 @@
             <a:endParaRPr lang="en-US" sz="1250" dirty="0"/>
           </a:p>
           <a:p>
-            <a:pPr indent="0" marL="0">
+            <a:pPr marL="0" indent="0">
               <a:lnSpc>
                 <a:spcPts val="1800"/>
               </a:lnSpc>
@@ -8781,7 +8423,7 @@
             <a:endParaRPr lang="en-US" sz="1250" dirty="0"/>
           </a:p>
           <a:p>
-            <a:pPr indent="0" marL="0">
+            <a:pPr marL="0" indent="0">
               <a:lnSpc>
                 <a:spcPts val="1800"/>
               </a:lnSpc>
@@ -8790,7 +8432,7 @@
             <a:endParaRPr lang="en-US" sz="1250" dirty="0"/>
           </a:p>
           <a:p>
-            <a:pPr indent="0" marL="0">
+            <a:pPr marL="0" indent="0">
               <a:lnSpc>
                 <a:spcPts val="1800"/>
               </a:lnSpc>
@@ -8857,7 +8499,7 @@
           <a:bodyPr wrap="square" rtlCol="0" anchor="ctr"/>
           <a:lstStyle/>
           <a:p>
-            <a:pPr indent="0" marL="0">
+            <a:pPr marL="0" indent="0">
               <a:buNone/>
             </a:pPr>
             <a:r>
@@ -8878,7 +8520,7 @@
       <p:sp>
         <p:nvSpPr>
           <p:cNvPr id="10" name="Text 8">
-            <a:hlinkClick r:id="rId2" tooltip=""/>
+            <a:hlinkClick r:id="rId4"/>
           </p:cNvPr>
           <p:cNvSpPr/>
           <p:nvPr/>
@@ -8898,7 +8540,7 @@
           <a:bodyPr wrap="square" rtlCol="0" anchor="ctr"/>
           <a:lstStyle/>
           <a:p>
-            <a:pPr indent="0" marL="0">
+            <a:pPr marL="0" indent="0">
               <a:buNone/>
             </a:pPr>
             <a:r>
@@ -8909,10 +8551,10 @@
                 <a:latin typeface="Arial" pitchFamily="34" charset="0"/>
                 <a:ea typeface="Arial" pitchFamily="34" charset="-122"/>
                 <a:cs typeface="Arial" pitchFamily="34" charset="-120"/>
-                <a:hlinkClick r:id="rId2" invalidUrl="" action="" tgtFrame="" tooltip="" history="1" highlightClick="0" endSnd="0">
+                <a:hlinkClick r:id="rId4">
                   <a:extLst>
                     <a:ext uri="{A12FA001-AC4F-418D-AE19-62706E023703}">
-                      <ahyp:hlinkClr xmlns:ahyp="http://schemas.microsoft.com/office/drawing/2018/hyperlinkcolor" val="tx"/>
+                      <ahyp:hlinkClr xmlns:ahyp="http://schemas.microsoft.com/office/drawing/2018/hyperlinkcolor" xmlns="" val="tx"/>
                     </a:ext>
                   </a:extLst>
                 </a:hlinkClick>
@@ -8944,7 +8586,7 @@
           <a:bodyPr wrap="square" rtlCol="0" anchor="ctr"/>
           <a:lstStyle/>
           <a:p>
-            <a:pPr indent="0" marL="0">
+            <a:pPr marL="0" indent="0">
               <a:lnSpc>
                 <a:spcPts val="1800"/>
               </a:lnSpc>
@@ -8964,7 +8606,7 @@
             <a:endParaRPr lang="en-US" sz="1250" dirty="0"/>
           </a:p>
           <a:p>
-            <a:pPr indent="0" marL="0">
+            <a:pPr marL="0" indent="0">
               <a:lnSpc>
                 <a:spcPts val="1800"/>
               </a:lnSpc>
@@ -8973,7 +8615,7 @@
             <a:endParaRPr lang="en-US" sz="1250" dirty="0"/>
           </a:p>
           <a:p>
-            <a:pPr indent="0" marL="0">
+            <a:pPr marL="0" indent="0">
               <a:lnSpc>
                 <a:spcPts val="1800"/>
               </a:lnSpc>
@@ -8993,7 +8635,7 @@
             <a:endParaRPr lang="en-US" sz="1250" dirty="0"/>
           </a:p>
           <a:p>
-            <a:pPr indent="0" marL="0">
+            <a:pPr marL="0" indent="0">
               <a:lnSpc>
                 <a:spcPts val="1800"/>
               </a:lnSpc>
@@ -9002,7 +8644,7 @@
             <a:endParaRPr lang="en-US" sz="1250" dirty="0"/>
           </a:p>
           <a:p>
-            <a:pPr indent="0" marL="0">
+            <a:pPr marL="0" indent="0">
               <a:lnSpc>
                 <a:spcPts val="1800"/>
               </a:lnSpc>
@@ -9022,7 +8664,7 @@
             <a:endParaRPr lang="en-US" sz="1250" dirty="0"/>
           </a:p>
           <a:p>
-            <a:pPr indent="0" marL="0">
+            <a:pPr marL="0" indent="0">
               <a:lnSpc>
                 <a:spcPts val="1800"/>
               </a:lnSpc>
@@ -9031,7 +8673,7 @@
             <a:endParaRPr lang="en-US" sz="1250" dirty="0"/>
           </a:p>
           <a:p>
-            <a:pPr indent="0" marL="0">
+            <a:pPr marL="0" indent="0">
               <a:lnSpc>
                 <a:spcPts val="1800"/>
               </a:lnSpc>
@@ -9353,4 +8995,265 @@
     </a:ext>
   </a:extLst>
 </a:theme>
+</file>
+
+<file path=ppt/theme/theme2.xml><?xml version="1.0" encoding="utf-8"?>
+<a:theme xmlns:a="http://schemas.openxmlformats.org/drawingml/2006/main" name="Office Theme">
+  <a:themeElements>
+    <a:clrScheme name="Office">
+      <a:dk1>
+        <a:sysClr val="windowText" lastClr="000000"/>
+      </a:dk1>
+      <a:lt1>
+        <a:sysClr val="window" lastClr="FFFFFF"/>
+      </a:lt1>
+      <a:dk2>
+        <a:srgbClr val="44546A"/>
+      </a:dk2>
+      <a:lt2>
+        <a:srgbClr val="E7E6E6"/>
+      </a:lt2>
+      <a:accent1>
+        <a:srgbClr val="5B9BD5"/>
+      </a:accent1>
+      <a:accent2>
+        <a:srgbClr val="ED7D31"/>
+      </a:accent2>
+      <a:accent3>
+        <a:srgbClr val="A5A5A5"/>
+      </a:accent3>
+      <a:accent4>
+        <a:srgbClr val="FFC000"/>
+      </a:accent4>
+      <a:accent5>
+        <a:srgbClr val="4472C4"/>
+      </a:accent5>
+      <a:accent6>
+        <a:srgbClr val="70AD47"/>
+      </a:accent6>
+      <a:hlink>
+        <a:srgbClr val="0563C1"/>
+      </a:hlink>
+      <a:folHlink>
+        <a:srgbClr val="954F72"/>
+      </a:folHlink>
+    </a:clrScheme>
+    <a:fontScheme name="Office">
+      <a:majorFont>
+        <a:latin typeface="Calibri Light" panose="020F0302020204030204"/>
+        <a:ea typeface=""/>
+        <a:cs typeface=""/>
+        <a:font script="Jpan" typeface="游ゴシック Light"/>
+        <a:font script="Hang" typeface="맑은 고딕"/>
+        <a:font script="Hans" typeface="等线 Light"/>
+        <a:font script="Hant" typeface="新細明體"/>
+        <a:font script="Arab" typeface="Times New Roman"/>
+        <a:font script="Hebr" typeface="Times New Roman"/>
+        <a:font script="Thai" typeface="Angsana New"/>
+        <a:font script="Ethi" typeface="Nyala"/>
+        <a:font script="Beng" typeface="Vrinda"/>
+        <a:font script="Gujr" typeface="Shruti"/>
+        <a:font script="Khmr" typeface="MoolBoran"/>
+        <a:font script="Knda" typeface="Tunga"/>
+        <a:font script="Guru" typeface="Raavi"/>
+        <a:font script="Cans" typeface="Euphemia"/>
+        <a:font script="Cher" typeface="Plantagenet Cherokee"/>
+        <a:font script="Yiii" typeface="Microsoft Yi Baiti"/>
+        <a:font script="Tibt" typeface="Microsoft Himalaya"/>
+        <a:font script="Thaa" typeface="MV Boli"/>
+        <a:font script="Deva" typeface="Mangal"/>
+        <a:font script="Telu" typeface="Gautami"/>
+        <a:font script="Taml" typeface="Latha"/>
+        <a:font script="Syrc" typeface="Estrangelo Edessa"/>
+        <a:font script="Orya" typeface="Kalinga"/>
+        <a:font script="Mlym" typeface="Kartika"/>
+        <a:font script="Laoo" typeface="DokChampa"/>
+        <a:font script="Sinh" typeface="Iskoola Pota"/>
+        <a:font script="Mong" typeface="Mongolian Baiti"/>
+        <a:font script="Viet" typeface="Times New Roman"/>
+        <a:font script="Uigh" typeface="Microsoft Uighur"/>
+        <a:font script="Geor" typeface="Sylfaen"/>
+      </a:majorFont>
+      <a:minorFont>
+        <a:latin typeface="Calibri" panose="020F0502020204030204"/>
+        <a:ea typeface=""/>
+        <a:cs typeface=""/>
+        <a:font script="Jpan" typeface="游ゴシック"/>
+        <a:font script="Hang" typeface="맑은 고딕"/>
+        <a:font script="Hans" typeface="等线"/>
+        <a:font script="Hant" typeface="新細明體"/>
+        <a:font script="Arab" typeface="Arial"/>
+        <a:font script="Hebr" typeface="Arial"/>
+        <a:font script="Thai" typeface="Cordia New"/>
+        <a:font script="Ethi" typeface="Nyala"/>
+        <a:font script="Beng" typeface="Vrinda"/>
+        <a:font script="Gujr" typeface="Shruti"/>
+        <a:font script="Khmr" typeface="DaunPenh"/>
+        <a:font script="Knda" typeface="Tunga"/>
+        <a:font script="Guru" typeface="Raavi"/>
+        <a:font script="Cans" typeface="Euphemia"/>
+        <a:font script="Cher" typeface="Plantagenet Cherokee"/>
+        <a:font script="Yiii" typeface="Microsoft Yi Baiti"/>
+        <a:font script="Tibt" typeface="Microsoft Himalaya"/>
+        <a:font script="Thaa" typeface="MV Boli"/>
+        <a:font script="Deva" typeface="Mangal"/>
+        <a:font script="Telu" typeface="Gautami"/>
+        <a:font script="Taml" typeface="Latha"/>
+        <a:font script="Syrc" typeface="Estrangelo Edessa"/>
+        <a:font script="Orya" typeface="Kalinga"/>
+        <a:font script="Mlym" typeface="Kartika"/>
+        <a:font script="Laoo" typeface="DokChampa"/>
+        <a:font script="Sinh" typeface="Iskoola Pota"/>
+        <a:font script="Mong" typeface="Mongolian Baiti"/>
+        <a:font script="Viet" typeface="Arial"/>
+        <a:font script="Uigh" typeface="Microsoft Uighur"/>
+        <a:font script="Geor" typeface="Sylfaen"/>
+      </a:minorFont>
+    </a:fontScheme>
+    <a:fmtScheme name="Office">
+      <a:fillStyleLst>
+        <a:solidFill>
+          <a:schemeClr val="phClr"/>
+        </a:solidFill>
+        <a:gradFill rotWithShape="1">
+          <a:gsLst>
+            <a:gs pos="0">
+              <a:schemeClr val="phClr">
+                <a:lumMod val="110000"/>
+                <a:satMod val="105000"/>
+                <a:tint val="67000"/>
+              </a:schemeClr>
+            </a:gs>
+            <a:gs pos="50000">
+              <a:schemeClr val="phClr">
+                <a:lumMod val="105000"/>
+                <a:satMod val="103000"/>
+                <a:tint val="73000"/>
+              </a:schemeClr>
+            </a:gs>
+            <a:gs pos="100000">
+              <a:schemeClr val="phClr">
+                <a:lumMod val="105000"/>
+                <a:satMod val="109000"/>
+                <a:tint val="81000"/>
+              </a:schemeClr>
+            </a:gs>
+          </a:gsLst>
+          <a:lin ang="5400000" scaled="0"/>
+        </a:gradFill>
+        <a:gradFill rotWithShape="1">
+          <a:gsLst>
+            <a:gs pos="0">
+              <a:schemeClr val="phClr">
+                <a:satMod val="103000"/>
+                <a:lumMod val="102000"/>
+                <a:tint val="94000"/>
+              </a:schemeClr>
+            </a:gs>
+            <a:gs pos="50000">
+              <a:schemeClr val="phClr">
+                <a:satMod val="110000"/>
+                <a:lumMod val="100000"/>
+                <a:shade val="100000"/>
+              </a:schemeClr>
+            </a:gs>
+            <a:gs pos="100000">
+              <a:schemeClr val="phClr">
+                <a:lumMod val="99000"/>
+                <a:satMod val="120000"/>
+                <a:shade val="78000"/>
+              </a:schemeClr>
+            </a:gs>
+          </a:gsLst>
+          <a:lin ang="5400000" scaled="0"/>
+        </a:gradFill>
+      </a:fillStyleLst>
+      <a:lnStyleLst>
+        <a:ln w="6350" cap="flat" cmpd="sng" algn="ctr">
+          <a:solidFill>
+            <a:schemeClr val="phClr"/>
+          </a:solidFill>
+          <a:prstDash val="solid"/>
+          <a:miter lim="800000"/>
+        </a:ln>
+        <a:ln w="12700" cap="flat" cmpd="sng" algn="ctr">
+          <a:solidFill>
+            <a:schemeClr val="phClr"/>
+          </a:solidFill>
+          <a:prstDash val="solid"/>
+          <a:miter lim="800000"/>
+        </a:ln>
+        <a:ln w="19050" cap="flat" cmpd="sng" algn="ctr">
+          <a:solidFill>
+            <a:schemeClr val="phClr"/>
+          </a:solidFill>
+          <a:prstDash val="solid"/>
+          <a:miter lim="800000"/>
+        </a:ln>
+      </a:lnStyleLst>
+      <a:effectStyleLst>
+        <a:effectStyle>
+          <a:effectLst/>
+        </a:effectStyle>
+        <a:effectStyle>
+          <a:effectLst/>
+        </a:effectStyle>
+        <a:effectStyle>
+          <a:effectLst>
+            <a:outerShdw blurRad="57150" dist="19050" dir="5400000" algn="ctr" rotWithShape="0">
+              <a:srgbClr val="000000">
+                <a:alpha val="63000"/>
+              </a:srgbClr>
+            </a:outerShdw>
+          </a:effectLst>
+        </a:effectStyle>
+      </a:effectStyleLst>
+      <a:bgFillStyleLst>
+        <a:solidFill>
+          <a:schemeClr val="phClr"/>
+        </a:solidFill>
+        <a:solidFill>
+          <a:schemeClr val="phClr">
+            <a:tint val="95000"/>
+            <a:satMod val="170000"/>
+          </a:schemeClr>
+        </a:solidFill>
+        <a:gradFill rotWithShape="1">
+          <a:gsLst>
+            <a:gs pos="0">
+              <a:schemeClr val="phClr">
+                <a:tint val="93000"/>
+                <a:satMod val="150000"/>
+                <a:shade val="98000"/>
+                <a:lumMod val="102000"/>
+              </a:schemeClr>
+            </a:gs>
+            <a:gs pos="50000">
+              <a:schemeClr val="phClr">
+                <a:tint val="98000"/>
+                <a:satMod val="130000"/>
+                <a:shade val="90000"/>
+                <a:lumMod val="103000"/>
+              </a:schemeClr>
+            </a:gs>
+            <a:gs pos="100000">
+              <a:schemeClr val="phClr">
+                <a:shade val="63000"/>
+                <a:satMod val="120000"/>
+              </a:schemeClr>
+            </a:gs>
+          </a:gsLst>
+          <a:lin ang="5400000" scaled="0"/>
+        </a:gradFill>
+      </a:bgFillStyleLst>
+    </a:fmtScheme>
+  </a:themeElements>
+  <a:objectDefaults/>
+  <a:extraClrSchemeLst/>
+  <a:extLst>
+    <a:ext uri="{05A4C25C-085E-4340-85A3-A5531E510DB2}">
+      <thm15:themeFamily xmlns:thm15="http://schemas.microsoft.com/office/thememl/2012/main" name="Office Theme" id="{62F939B6-93AF-4DB8-9C6B-D6C7DFDC589F}" vid="{4A3C46E8-61CC-4603-A589-7422A47A8E4A}"/>
+    </a:ext>
+  </a:extLst>
+</a:theme>
 </file>